--- a/els-sales-deck.pptx
+++ b/els-sales-deck.pptx
@@ -1395,7 +1395,7 @@
                 <a:ea typeface="맑은 고딕" pitchFamily="34" charset="-122"/>
                 <a:cs typeface="맑은 고딕" pitchFamily="34" charset="-120"/>
               </a:rPr>
-              <a:t>제38115~38131회</a:t>
+              <a:t>제38115~38132회</a:t>
             </a:r>
             <a:endParaRPr lang="en-US" sz="4000" dirty="0"/>
           </a:p>
@@ -1415,7 +1415,7 @@
                 <a:ea typeface="맑은 고딕" pitchFamily="34" charset="-122"/>
                 <a:cs typeface="맑은 고딕" pitchFamily="34" charset="-120"/>
               </a:rPr>
-              <a:t>17종</a:t>
+              <a:t>18종</a:t>
             </a:r>
             <a:endParaRPr lang="en-US" sz="4000" dirty="0"/>
           </a:p>
@@ -1454,7 +1454,7 @@
                 <a:ea typeface="맑은 고딕" pitchFamily="34" charset="-122"/>
                 <a:cs typeface="맑은 고딕" pitchFamily="34" charset="-120"/>
               </a:rPr>
-              <a:t>공모 청약 2026.09.14~2026.09.22 · 일괄신고추가서류 2026.09.11 공시 원문 기준</a:t>
+              <a:t>공모 청약 2026.09.14~2026.09.23 · 일괄신고추가서류 2026.09.11·2026.09.14 공시 원문 기준</a:t>
             </a:r>
             <a:endParaRPr lang="en-US" sz="1300" dirty="0"/>
           </a:p>
@@ -1624,7 +1624,7 @@
                 <a:ea typeface="맑은 고딕" pitchFamily="34" charset="-122"/>
                 <a:cs typeface="맑은 고딕" pitchFamily="34" charset="-120"/>
               </a:rPr>
-              <a:t>연 12.0% · 손실 확률 9.6%로 17종 중 가장 낮습니다 (위험 1%당 연 1.25% 로도 1위)</a:t>
+              <a:t>연 12.0% · 손실 확률 9.6%로 18종 중 가장 낮습니다 (위험 1%당 연 1.25% 로도 1위)</a:t>
             </a:r>
             <a:endParaRPr lang="en-US" sz="1050" dirty="0"/>
           </a:p>
@@ -2563,6 +2563,48 @@
         </p:nvSpPr>
         <p:spPr>
           <a:xfrm>
+            <a:off x="8065008" y="5504688"/>
+            <a:ext cx="3291840" cy="365760"/>
+          </a:xfrm>
+          <a:prstGeom prst="rect">
+            <a:avLst/>
+          </a:prstGeom>
+          <a:noFill/>
+          <a:ln/>
+        </p:spPr>
+        <p:txBody>
+          <a:bodyPr wrap="square" lIns="0" tIns="0" rIns="0" bIns="0" rtlCol="0" anchor="ctr"/>
+          <a:lstStyle/>
+          <a:p>
+            <a:pPr indent="0" marL="0">
+              <a:lnSpc>
+                <a:spcPts val="1100"/>
+              </a:lnSpc>
+              <a:buNone/>
+            </a:pPr>
+            <a:r>
+              <a:rPr lang="en-US" sz="850" dirty="0">
+                <a:solidFill>
+                  <a:srgbClr val="CB6015"/>
+                </a:solidFill>
+                <a:latin typeface="맑은 고딕" pitchFamily="34" charset="0"/>
+                <a:ea typeface="맑은 고딕" pitchFamily="34" charset="-122"/>
+                <a:cs typeface="맑은 고딕" pitchFamily="34" charset="-120"/>
+              </a:rPr>
+              <a:t>제38132회는 청약 2026.09.15~2026.09.23 (별도 공시)</a:t>
+            </a:r>
+            <a:endParaRPr lang="en-US" sz="850" dirty="0"/>
+          </a:p>
+        </p:txBody>
+      </p:sp>
+      <p:sp>
+        <p:nvSpPr>
+          <p:cNvPr id="36" name="Text 34"/>
+          <p:cNvSpPr/>
+          <p:nvPr/>
+        </p:nvSpPr>
+        <p:spPr>
+          <a:xfrm>
             <a:off x="566928" y="6144768"/>
             <a:ext cx="11057839" cy="256032"/>
           </a:xfrm>
@@ -2677,7 +2719,7 @@
                 <a:ea typeface="맑은 고딕" pitchFamily="34" charset="-122"/>
                 <a:cs typeface="맑은 고딕" pitchFamily="34" charset="-120"/>
               </a:rPr>
-              <a:t>이번 회차 17종 — 손실 확률로 줄 세우면</a:t>
+              <a:t>이번 회차 18종 — 손실 확률로 줄 세우면</a:t>
             </a:r>
             <a:endParaRPr lang="en-US" sz="2300" dirty="0"/>
           </a:p>
@@ -2758,7 +2800,7 @@
                 <a:gridCol w="1005840"/>
                 <a:gridCol w="862279"/>
               </a:tblGrid>
-              <a:tr h="252805">
+              <a:tr h="238760">
                 <a:tc>
                   <a:txBody>
                     <a:bodyPr/>
@@ -3744,7 +3786,7 @@
                   </a:tcPr>
                 </a:tc>
               </a:tr>
-              <a:tr h="252805">
+              <a:tr h="238760">
                 <a:tc>
                   <a:txBody>
                     <a:bodyPr/>
@@ -4576,7 +4618,7 @@
                   </a:tcPr>
                 </a:tc>
               </a:tr>
-              <a:tr h="252805">
+              <a:tr h="238760">
                 <a:tc>
                   <a:txBody>
                     <a:bodyPr/>
@@ -5394,7 +5436,7 @@
                   </a:tcPr>
                 </a:tc>
               </a:tr>
-              <a:tr h="252805">
+              <a:tr h="238760">
                 <a:tc>
                   <a:txBody>
                     <a:bodyPr/>
@@ -6212,7 +6254,7 @@
                   </a:tcPr>
                 </a:tc>
               </a:tr>
-              <a:tr h="252805">
+              <a:tr h="238760">
                 <a:tc>
                   <a:txBody>
                     <a:bodyPr/>
@@ -7030,7 +7072,7 @@
                   </a:tcPr>
                 </a:tc>
               </a:tr>
-              <a:tr h="252805">
+              <a:tr h="238760">
                 <a:tc>
                   <a:txBody>
                     <a:bodyPr/>
@@ -7848,7 +7890,7 @@
                   </a:tcPr>
                 </a:tc>
               </a:tr>
-              <a:tr h="252805">
+              <a:tr h="238760">
                 <a:tc>
                   <a:txBody>
                     <a:bodyPr/>
@@ -8666,7 +8708,7 @@
                   </a:tcPr>
                 </a:tc>
               </a:tr>
-              <a:tr h="252805">
+              <a:tr h="238760">
                 <a:tc>
                   <a:txBody>
                     <a:bodyPr/>
@@ -9484,7 +9526,7 @@
                   </a:tcPr>
                 </a:tc>
               </a:tr>
-              <a:tr h="252805">
+              <a:tr h="238760">
                 <a:tc>
                   <a:txBody>
                     <a:bodyPr/>
@@ -10302,7 +10344,7 @@
                   </a:tcPr>
                 </a:tc>
               </a:tr>
-              <a:tr h="252805">
+              <a:tr h="238760">
                 <a:tc>
                   <a:txBody>
                     <a:bodyPr/>
@@ -11120,7 +11162,7 @@
                   </a:tcPr>
                 </a:tc>
               </a:tr>
-              <a:tr h="252805">
+              <a:tr h="238760">
                 <a:tc>
                   <a:txBody>
                     <a:bodyPr/>
@@ -11952,7 +11994,825 @@
                   </a:tcPr>
                 </a:tc>
               </a:tr>
-              <a:tr h="252805">
+              <a:tr h="238760">
+                <a:tc>
+                  <a:txBody>
+                    <a:bodyPr/>
+                    <a:lstStyle/>
+                    <a:p>
+                      <a:pPr algn="ctr" indent="0" marL="0">
+                        <a:buNone/>
+                      </a:pPr>
+                      <a:r>
+                        <a:rPr lang="en-US" sz="900" dirty="0">
+                          <a:solidFill>
+                            <a:srgbClr val="1A1A1A"/>
+                          </a:solidFill>
+                          <a:latin typeface="맑은 고딕" pitchFamily="34" charset="0"/>
+                          <a:ea typeface="맑은 고딕" pitchFamily="34" charset="-122"/>
+                          <a:cs typeface="맑은 고딕" pitchFamily="34" charset="-120"/>
+                        </a:rPr>
+                        <a:t>38132</a:t>
+                      </a:r>
+                      <a:endParaRPr lang="en-US" sz="900" dirty="0">
+                        <a:latin typeface="맑은 고딕" charset="0"/>
+                        <a:ea typeface="맑은 고딕" charset="0"/>
+                        <a:cs typeface="맑은 고딕" charset="0"/>
+                      </a:endParaRPr>
+                    </a:p>
+                  </a:txBody>
+                  <a:tcPr marL="38100" marR="38100" marT="12700" marB="12700" anchor="ctr">
+                    <a:lnL w="6350" cap="flat" cmpd="sng" algn="ctr">
+                      <a:solidFill>
+                        <a:srgbClr val="CDCECB"/>
+                      </a:solidFill>
+                      <a:prstDash val="solid"/>
+                      <a:round/>
+                      <a:headEnd type="none" w="med" len="med"/>
+                      <a:tailEnd type="none" w="med" len="med"/>
+                    </a:lnL>
+                    <a:lnR w="6350" cap="flat" cmpd="sng" algn="ctr">
+                      <a:solidFill>
+                        <a:srgbClr val="CDCECB"/>
+                      </a:solidFill>
+                      <a:prstDash val="solid"/>
+                      <a:round/>
+                      <a:headEnd type="none" w="med" len="med"/>
+                      <a:tailEnd type="none" w="med" len="med"/>
+                    </a:lnR>
+                    <a:lnT w="6350" cap="flat" cmpd="sng" algn="ctr">
+                      <a:solidFill>
+                        <a:srgbClr val="CDCECB"/>
+                      </a:solidFill>
+                      <a:prstDash val="solid"/>
+                      <a:round/>
+                      <a:headEnd type="none" w="med" len="med"/>
+                      <a:tailEnd type="none" w="med" len="med"/>
+                    </a:lnT>
+                    <a:lnB w="6350" cap="flat" cmpd="sng" algn="ctr">
+                      <a:solidFill>
+                        <a:srgbClr val="CDCECB"/>
+                      </a:solidFill>
+                      <a:prstDash val="solid"/>
+                      <a:round/>
+                      <a:headEnd type="none" w="med" len="med"/>
+                      <a:tailEnd type="none" w="med" len="med"/>
+                    </a:lnB>
+                    <a:solidFill>
+                      <a:srgbClr val="FFFFFF"/>
+                    </a:solidFill>
+                  </a:tcPr>
+                </a:tc>
+                <a:tc>
+                  <a:txBody>
+                    <a:bodyPr/>
+                    <a:lstStyle/>
+                    <a:p>
+                      <a:pPr indent="0" marL="0">
+                        <a:buNone/>
+                      </a:pPr>
+                      <a:r>
+                        <a:rPr lang="en-US" sz="850" dirty="0">
+                          <a:solidFill>
+                            <a:srgbClr val="3D3D3D"/>
+                          </a:solidFill>
+                          <a:latin typeface="맑은 고딕" pitchFamily="34" charset="0"/>
+                          <a:ea typeface="맑은 고딕" pitchFamily="34" charset="-122"/>
+                          <a:cs typeface="맑은 고딕" pitchFamily="34" charset="-120"/>
+                        </a:rPr>
+                        <a:t>Nikkei225·삼성전자·SK하이닉스</a:t>
+                      </a:r>
+                      <a:endParaRPr lang="en-US" sz="850" dirty="0">
+                        <a:latin typeface="맑은 고딕" charset="0"/>
+                        <a:ea typeface="맑은 고딕" charset="0"/>
+                        <a:cs typeface="맑은 고딕" charset="0"/>
+                      </a:endParaRPr>
+                    </a:p>
+                  </a:txBody>
+                  <a:tcPr marL="38100" marR="38100" marT="12700" marB="12700" anchor="ctr">
+                    <a:lnL w="6350" cap="flat" cmpd="sng" algn="ctr">
+                      <a:solidFill>
+                        <a:srgbClr val="CDCECB"/>
+                      </a:solidFill>
+                      <a:prstDash val="solid"/>
+                      <a:round/>
+                      <a:headEnd type="none" w="med" len="med"/>
+                      <a:tailEnd type="none" w="med" len="med"/>
+                    </a:lnL>
+                    <a:lnR w="6350" cap="flat" cmpd="sng" algn="ctr">
+                      <a:solidFill>
+                        <a:srgbClr val="CDCECB"/>
+                      </a:solidFill>
+                      <a:prstDash val="solid"/>
+                      <a:round/>
+                      <a:headEnd type="none" w="med" len="med"/>
+                      <a:tailEnd type="none" w="med" len="med"/>
+                    </a:lnR>
+                    <a:lnT w="6350" cap="flat" cmpd="sng" algn="ctr">
+                      <a:solidFill>
+                        <a:srgbClr val="CDCECB"/>
+                      </a:solidFill>
+                      <a:prstDash val="solid"/>
+                      <a:round/>
+                      <a:headEnd type="none" w="med" len="med"/>
+                      <a:tailEnd type="none" w="med" len="med"/>
+                    </a:lnT>
+                    <a:lnB w="6350" cap="flat" cmpd="sng" algn="ctr">
+                      <a:solidFill>
+                        <a:srgbClr val="CDCECB"/>
+                      </a:solidFill>
+                      <a:prstDash val="solid"/>
+                      <a:round/>
+                      <a:headEnd type="none" w="med" len="med"/>
+                      <a:tailEnd type="none" w="med" len="med"/>
+                    </a:lnB>
+                    <a:solidFill>
+                      <a:srgbClr val="FFFFFF"/>
+                    </a:solidFill>
+                  </a:tcPr>
+                </a:tc>
+                <a:tc>
+                  <a:txBody>
+                    <a:bodyPr/>
+                    <a:lstStyle/>
+                    <a:p>
+                      <a:pPr algn="r" indent="0" marL="0">
+                        <a:buNone/>
+                      </a:pPr>
+                      <a:r>
+                        <a:rPr lang="en-US" sz="900" b="1" dirty="0">
+                          <a:solidFill>
+                            <a:srgbClr val="1A1A1A"/>
+                          </a:solidFill>
+                          <a:latin typeface="맑은 고딕" pitchFamily="34" charset="0"/>
+                          <a:ea typeface="맑은 고딕" pitchFamily="34" charset="-122"/>
+                          <a:cs typeface="맑은 고딕" pitchFamily="34" charset="-120"/>
+                        </a:rPr>
+                        <a:t>20.8%</a:t>
+                      </a:r>
+                      <a:endParaRPr lang="en-US" sz="900" dirty="0">
+                        <a:latin typeface="맑은 고딕" charset="0"/>
+                        <a:ea typeface="맑은 고딕" charset="0"/>
+                        <a:cs typeface="맑은 고딕" charset="0"/>
+                      </a:endParaRPr>
+                    </a:p>
+                  </a:txBody>
+                  <a:tcPr marL="38100" marR="38100" marT="12700" marB="12700" anchor="ctr">
+                    <a:lnL w="6350" cap="flat" cmpd="sng" algn="ctr">
+                      <a:solidFill>
+                        <a:srgbClr val="CDCECB"/>
+                      </a:solidFill>
+                      <a:prstDash val="solid"/>
+                      <a:round/>
+                      <a:headEnd type="none" w="med" len="med"/>
+                      <a:tailEnd type="none" w="med" len="med"/>
+                    </a:lnL>
+                    <a:lnR w="6350" cap="flat" cmpd="sng" algn="ctr">
+                      <a:solidFill>
+                        <a:srgbClr val="CDCECB"/>
+                      </a:solidFill>
+                      <a:prstDash val="solid"/>
+                      <a:round/>
+                      <a:headEnd type="none" w="med" len="med"/>
+                      <a:tailEnd type="none" w="med" len="med"/>
+                    </a:lnR>
+                    <a:lnT w="6350" cap="flat" cmpd="sng" algn="ctr">
+                      <a:solidFill>
+                        <a:srgbClr val="CDCECB"/>
+                      </a:solidFill>
+                      <a:prstDash val="solid"/>
+                      <a:round/>
+                      <a:headEnd type="none" w="med" len="med"/>
+                      <a:tailEnd type="none" w="med" len="med"/>
+                    </a:lnT>
+                    <a:lnB w="6350" cap="flat" cmpd="sng" algn="ctr">
+                      <a:solidFill>
+                        <a:srgbClr val="CDCECB"/>
+                      </a:solidFill>
+                      <a:prstDash val="solid"/>
+                      <a:round/>
+                      <a:headEnd type="none" w="med" len="med"/>
+                      <a:tailEnd type="none" w="med" len="med"/>
+                    </a:lnB>
+                    <a:solidFill>
+                      <a:srgbClr val="FFFFFF"/>
+                    </a:solidFill>
+                  </a:tcPr>
+                </a:tc>
+                <a:tc>
+                  <a:txBody>
+                    <a:bodyPr/>
+                    <a:lstStyle/>
+                    <a:p>
+                      <a:pPr algn="ctr" indent="0" marL="0">
+                        <a:buNone/>
+                      </a:pPr>
+                      <a:r>
+                        <a:rPr lang="en-US" sz="850" dirty="0">
+                          <a:solidFill>
+                            <a:srgbClr val="3D3D3D"/>
+                          </a:solidFill>
+                          <a:latin typeface="맑은 고딕" pitchFamily="34" charset="0"/>
+                          <a:ea typeface="맑은 고딕" pitchFamily="34" charset="-122"/>
+                          <a:cs typeface="맑은 고딕" pitchFamily="34" charset="-120"/>
+                        </a:rPr>
+                        <a:t>6M · 6회</a:t>
+                      </a:r>
+                      <a:endParaRPr lang="en-US" sz="850" dirty="0">
+                        <a:latin typeface="맑은 고딕" charset="0"/>
+                        <a:ea typeface="맑은 고딕" charset="0"/>
+                        <a:cs typeface="맑은 고딕" charset="0"/>
+                      </a:endParaRPr>
+                    </a:p>
+                  </a:txBody>
+                  <a:tcPr marL="38100" marR="38100" marT="12700" marB="12700" anchor="ctr">
+                    <a:lnL w="6350" cap="flat" cmpd="sng" algn="ctr">
+                      <a:solidFill>
+                        <a:srgbClr val="CDCECB"/>
+                      </a:solidFill>
+                      <a:prstDash val="solid"/>
+                      <a:round/>
+                      <a:headEnd type="none" w="med" len="med"/>
+                      <a:tailEnd type="none" w="med" len="med"/>
+                    </a:lnL>
+                    <a:lnR w="6350" cap="flat" cmpd="sng" algn="ctr">
+                      <a:solidFill>
+                        <a:srgbClr val="CDCECB"/>
+                      </a:solidFill>
+                      <a:prstDash val="solid"/>
+                      <a:round/>
+                      <a:headEnd type="none" w="med" len="med"/>
+                      <a:tailEnd type="none" w="med" len="med"/>
+                    </a:lnR>
+                    <a:lnT w="6350" cap="flat" cmpd="sng" algn="ctr">
+                      <a:solidFill>
+                        <a:srgbClr val="CDCECB"/>
+                      </a:solidFill>
+                      <a:prstDash val="solid"/>
+                      <a:round/>
+                      <a:headEnd type="none" w="med" len="med"/>
+                      <a:tailEnd type="none" w="med" len="med"/>
+                    </a:lnT>
+                    <a:lnB w="6350" cap="flat" cmpd="sng" algn="ctr">
+                      <a:solidFill>
+                        <a:srgbClr val="CDCECB"/>
+                      </a:solidFill>
+                      <a:prstDash val="solid"/>
+                      <a:round/>
+                      <a:headEnd type="none" w="med" len="med"/>
+                      <a:tailEnd type="none" w="med" len="med"/>
+                    </a:lnB>
+                    <a:solidFill>
+                      <a:srgbClr val="FFFFFF"/>
+                    </a:solidFill>
+                  </a:tcPr>
+                </a:tc>
+                <a:tc>
+                  <a:txBody>
+                    <a:bodyPr/>
+                    <a:lstStyle/>
+                    <a:p>
+                      <a:pPr algn="ctr" indent="0" marL="0">
+                        <a:buNone/>
+                      </a:pPr>
+                      <a:r>
+                        <a:rPr lang="en-US" sz="800" dirty="0">
+                          <a:solidFill>
+                            <a:srgbClr val="3D3D3D"/>
+                          </a:solidFill>
+                          <a:latin typeface="맑은 고딕" pitchFamily="34" charset="0"/>
+                          <a:ea typeface="맑은 고딕" pitchFamily="34" charset="-122"/>
+                          <a:cs typeface="맑은 고딕" pitchFamily="34" charset="-120"/>
+                        </a:rPr>
+                        <a:t>80×2-75×2-70-65</a:t>
+                      </a:r>
+                      <a:endParaRPr lang="en-US" sz="800" dirty="0">
+                        <a:latin typeface="맑은 고딕" charset="0"/>
+                        <a:ea typeface="맑은 고딕" charset="0"/>
+                        <a:cs typeface="맑은 고딕" charset="0"/>
+                      </a:endParaRPr>
+                    </a:p>
+                  </a:txBody>
+                  <a:tcPr marL="38100" marR="38100" marT="12700" marB="12700" anchor="ctr">
+                    <a:lnL w="6350" cap="flat" cmpd="sng" algn="ctr">
+                      <a:solidFill>
+                        <a:srgbClr val="CDCECB"/>
+                      </a:solidFill>
+                      <a:prstDash val="solid"/>
+                      <a:round/>
+                      <a:headEnd type="none" w="med" len="med"/>
+                      <a:tailEnd type="none" w="med" len="med"/>
+                    </a:lnL>
+                    <a:lnR w="6350" cap="flat" cmpd="sng" algn="ctr">
+                      <a:solidFill>
+                        <a:srgbClr val="CDCECB"/>
+                      </a:solidFill>
+                      <a:prstDash val="solid"/>
+                      <a:round/>
+                      <a:headEnd type="none" w="med" len="med"/>
+                      <a:tailEnd type="none" w="med" len="med"/>
+                    </a:lnR>
+                    <a:lnT w="6350" cap="flat" cmpd="sng" algn="ctr">
+                      <a:solidFill>
+                        <a:srgbClr val="CDCECB"/>
+                      </a:solidFill>
+                      <a:prstDash val="solid"/>
+                      <a:round/>
+                      <a:headEnd type="none" w="med" len="med"/>
+                      <a:tailEnd type="none" w="med" len="med"/>
+                    </a:lnT>
+                    <a:lnB w="6350" cap="flat" cmpd="sng" algn="ctr">
+                      <a:solidFill>
+                        <a:srgbClr val="CDCECB"/>
+                      </a:solidFill>
+                      <a:prstDash val="solid"/>
+                      <a:round/>
+                      <a:headEnd type="none" w="med" len="med"/>
+                      <a:tailEnd type="none" w="med" len="med"/>
+                    </a:lnB>
+                    <a:solidFill>
+                      <a:srgbClr val="FFFFFF"/>
+                    </a:solidFill>
+                  </a:tcPr>
+                </a:tc>
+                <a:tc>
+                  <a:txBody>
+                    <a:bodyPr/>
+                    <a:lstStyle/>
+                    <a:p>
+                      <a:pPr algn="ctr" indent="0" marL="0">
+                        <a:buNone/>
+                      </a:pPr>
+                      <a:r>
+                        <a:rPr lang="en-US" sz="900" dirty="0">
+                          <a:solidFill>
+                            <a:srgbClr val="3D3D3D"/>
+                          </a:solidFill>
+                          <a:latin typeface="맑은 고딕" pitchFamily="34" charset="0"/>
+                          <a:ea typeface="맑은 고딕" pitchFamily="34" charset="-122"/>
+                          <a:cs typeface="맑은 고딕" pitchFamily="34" charset="-120"/>
+                        </a:rPr>
+                        <a:t>30</a:t>
+                      </a:r>
+                      <a:endParaRPr lang="en-US" sz="900" dirty="0">
+                        <a:latin typeface="맑은 고딕" charset="0"/>
+                        <a:ea typeface="맑은 고딕" charset="0"/>
+                        <a:cs typeface="맑은 고딕" charset="0"/>
+                      </a:endParaRPr>
+                    </a:p>
+                  </a:txBody>
+                  <a:tcPr marL="38100" marR="38100" marT="12700" marB="12700" anchor="ctr">
+                    <a:lnL w="6350" cap="flat" cmpd="sng" algn="ctr">
+                      <a:solidFill>
+                        <a:srgbClr val="CDCECB"/>
+                      </a:solidFill>
+                      <a:prstDash val="solid"/>
+                      <a:round/>
+                      <a:headEnd type="none" w="med" len="med"/>
+                      <a:tailEnd type="none" w="med" len="med"/>
+                    </a:lnL>
+                    <a:lnR w="6350" cap="flat" cmpd="sng" algn="ctr">
+                      <a:solidFill>
+                        <a:srgbClr val="CDCECB"/>
+                      </a:solidFill>
+                      <a:prstDash val="solid"/>
+                      <a:round/>
+                      <a:headEnd type="none" w="med" len="med"/>
+                      <a:tailEnd type="none" w="med" len="med"/>
+                    </a:lnR>
+                    <a:lnT w="6350" cap="flat" cmpd="sng" algn="ctr">
+                      <a:solidFill>
+                        <a:srgbClr val="CDCECB"/>
+                      </a:solidFill>
+                      <a:prstDash val="solid"/>
+                      <a:round/>
+                      <a:headEnd type="none" w="med" len="med"/>
+                      <a:tailEnd type="none" w="med" len="med"/>
+                    </a:lnT>
+                    <a:lnB w="6350" cap="flat" cmpd="sng" algn="ctr">
+                      <a:solidFill>
+                        <a:srgbClr val="CDCECB"/>
+                      </a:solidFill>
+                      <a:prstDash val="solid"/>
+                      <a:round/>
+                      <a:headEnd type="none" w="med" len="med"/>
+                      <a:tailEnd type="none" w="med" len="med"/>
+                    </a:lnB>
+                    <a:solidFill>
+                      <a:srgbClr val="FFFFFF"/>
+                    </a:solidFill>
+                  </a:tcPr>
+                </a:tc>
+                <a:tc>
+                  <a:txBody>
+                    <a:bodyPr/>
+                    <a:lstStyle/>
+                    <a:p>
+                      <a:pPr algn="r" indent="0" marL="0">
+                        <a:buNone/>
+                      </a:pPr>
+                      <a:r>
+                        <a:rPr lang="en-US" sz="900" b="1" dirty="0">
+                          <a:solidFill>
+                            <a:srgbClr val="8A6A0B"/>
+                          </a:solidFill>
+                          <a:latin typeface="맑은 고딕" pitchFamily="34" charset="0"/>
+                          <a:ea typeface="맑은 고딕" pitchFamily="34" charset="-122"/>
+                          <a:cs typeface="맑은 고딕" pitchFamily="34" charset="-120"/>
+                        </a:rPr>
+                        <a:t>21.7% ±0.18</a:t>
+                      </a:r>
+                      <a:endParaRPr lang="en-US" sz="900" dirty="0">
+                        <a:latin typeface="맑은 고딕" charset="0"/>
+                        <a:ea typeface="맑은 고딕" charset="0"/>
+                        <a:cs typeface="맑은 고딕" charset="0"/>
+                      </a:endParaRPr>
+                    </a:p>
+                  </a:txBody>
+                  <a:tcPr marL="38100" marR="38100" marT="12700" marB="12700" anchor="ctr">
+                    <a:lnL w="6350" cap="flat" cmpd="sng" algn="ctr">
+                      <a:solidFill>
+                        <a:srgbClr val="CDCECB"/>
+                      </a:solidFill>
+                      <a:prstDash val="solid"/>
+                      <a:round/>
+                      <a:headEnd type="none" w="med" len="med"/>
+                      <a:tailEnd type="none" w="med" len="med"/>
+                    </a:lnL>
+                    <a:lnR w="6350" cap="flat" cmpd="sng" algn="ctr">
+                      <a:solidFill>
+                        <a:srgbClr val="CDCECB"/>
+                      </a:solidFill>
+                      <a:prstDash val="solid"/>
+                      <a:round/>
+                      <a:headEnd type="none" w="med" len="med"/>
+                      <a:tailEnd type="none" w="med" len="med"/>
+                    </a:lnR>
+                    <a:lnT w="6350" cap="flat" cmpd="sng" algn="ctr">
+                      <a:solidFill>
+                        <a:srgbClr val="CDCECB"/>
+                      </a:solidFill>
+                      <a:prstDash val="solid"/>
+                      <a:round/>
+                      <a:headEnd type="none" w="med" len="med"/>
+                      <a:tailEnd type="none" w="med" len="med"/>
+                    </a:lnT>
+                    <a:lnB w="6350" cap="flat" cmpd="sng" algn="ctr">
+                      <a:solidFill>
+                        <a:srgbClr val="CDCECB"/>
+                      </a:solidFill>
+                      <a:prstDash val="solid"/>
+                      <a:round/>
+                      <a:headEnd type="none" w="med" len="med"/>
+                      <a:tailEnd type="none" w="med" len="med"/>
+                    </a:lnB>
+                    <a:solidFill>
+                      <a:srgbClr val="FFFFFF"/>
+                    </a:solidFill>
+                  </a:tcPr>
+                </a:tc>
+                <a:tc>
+                  <a:txBody>
+                    <a:bodyPr/>
+                    <a:lstStyle/>
+                    <a:p>
+                      <a:pPr algn="ctr" indent="0" marL="0">
+                        <a:buNone/>
+                      </a:pPr>
+                      <a:r>
+                        <a:rPr lang="en-US" sz="900" b="1" dirty="0">
+                          <a:solidFill>
+                            <a:srgbClr val="8A6A0B"/>
+                          </a:solidFill>
+                          <a:latin typeface="맑은 고딕" pitchFamily="34" charset="0"/>
+                          <a:ea typeface="맑은 고딕" pitchFamily="34" charset="-122"/>
+                          <a:cs typeface="맑은 고딕" pitchFamily="34" charset="-120"/>
+                        </a:rPr>
+                        <a:t>중간</a:t>
+                      </a:r>
+                      <a:endParaRPr lang="en-US" sz="900" dirty="0">
+                        <a:latin typeface="맑은 고딕" charset="0"/>
+                        <a:ea typeface="맑은 고딕" charset="0"/>
+                        <a:cs typeface="맑은 고딕" charset="0"/>
+                      </a:endParaRPr>
+                    </a:p>
+                  </a:txBody>
+                  <a:tcPr marL="38100" marR="38100" marT="12700" marB="12700" anchor="ctr">
+                    <a:lnL w="6350" cap="flat" cmpd="sng" algn="ctr">
+                      <a:solidFill>
+                        <a:srgbClr val="CDCECB"/>
+                      </a:solidFill>
+                      <a:prstDash val="solid"/>
+                      <a:round/>
+                      <a:headEnd type="none" w="med" len="med"/>
+                      <a:tailEnd type="none" w="med" len="med"/>
+                    </a:lnL>
+                    <a:lnR w="6350" cap="flat" cmpd="sng" algn="ctr">
+                      <a:solidFill>
+                        <a:srgbClr val="CDCECB"/>
+                      </a:solidFill>
+                      <a:prstDash val="solid"/>
+                      <a:round/>
+                      <a:headEnd type="none" w="med" len="med"/>
+                      <a:tailEnd type="none" w="med" len="med"/>
+                    </a:lnR>
+                    <a:lnT w="6350" cap="flat" cmpd="sng" algn="ctr">
+                      <a:solidFill>
+                        <a:srgbClr val="CDCECB"/>
+                      </a:solidFill>
+                      <a:prstDash val="solid"/>
+                      <a:round/>
+                      <a:headEnd type="none" w="med" len="med"/>
+                      <a:tailEnd type="none" w="med" len="med"/>
+                    </a:lnT>
+                    <a:lnB w="6350" cap="flat" cmpd="sng" algn="ctr">
+                      <a:solidFill>
+                        <a:srgbClr val="CDCECB"/>
+                      </a:solidFill>
+                      <a:prstDash val="solid"/>
+                      <a:round/>
+                      <a:headEnd type="none" w="med" len="med"/>
+                      <a:tailEnd type="none" w="med" len="med"/>
+                    </a:lnB>
+                    <a:solidFill>
+                      <a:srgbClr val="FBF2DC"/>
+                    </a:solidFill>
+                  </a:tcPr>
+                </a:tc>
+                <a:tc>
+                  <a:txBody>
+                    <a:bodyPr/>
+                    <a:lstStyle/>
+                    <a:p>
+                      <a:pPr algn="r" indent="0" marL="0">
+                        <a:buNone/>
+                      </a:pPr>
+                      <a:r>
+                        <a:rPr lang="en-US" sz="900" dirty="0">
+                          <a:solidFill>
+                            <a:srgbClr val="2E8540"/>
+                          </a:solidFill>
+                          <a:latin typeface="맑은 고딕" pitchFamily="34" charset="0"/>
+                          <a:ea typeface="맑은 고딕" pitchFamily="34" charset="-122"/>
+                          <a:cs typeface="맑은 고딕" pitchFamily="34" charset="-120"/>
+                        </a:rPr>
+                        <a:t>56.2%</a:t>
+                      </a:r>
+                      <a:endParaRPr lang="en-US" sz="900" dirty="0">
+                        <a:latin typeface="맑은 고딕" charset="0"/>
+                        <a:ea typeface="맑은 고딕" charset="0"/>
+                        <a:cs typeface="맑은 고딕" charset="0"/>
+                      </a:endParaRPr>
+                    </a:p>
+                  </a:txBody>
+                  <a:tcPr marL="38100" marR="38100" marT="12700" marB="12700" anchor="ctr">
+                    <a:lnL w="6350" cap="flat" cmpd="sng" algn="ctr">
+                      <a:solidFill>
+                        <a:srgbClr val="CDCECB"/>
+                      </a:solidFill>
+                      <a:prstDash val="solid"/>
+                      <a:round/>
+                      <a:headEnd type="none" w="med" len="med"/>
+                      <a:tailEnd type="none" w="med" len="med"/>
+                    </a:lnL>
+                    <a:lnR w="6350" cap="flat" cmpd="sng" algn="ctr">
+                      <a:solidFill>
+                        <a:srgbClr val="CDCECB"/>
+                      </a:solidFill>
+                      <a:prstDash val="solid"/>
+                      <a:round/>
+                      <a:headEnd type="none" w="med" len="med"/>
+                      <a:tailEnd type="none" w="med" len="med"/>
+                    </a:lnR>
+                    <a:lnT w="6350" cap="flat" cmpd="sng" algn="ctr">
+                      <a:solidFill>
+                        <a:srgbClr val="CDCECB"/>
+                      </a:solidFill>
+                      <a:prstDash val="solid"/>
+                      <a:round/>
+                      <a:headEnd type="none" w="med" len="med"/>
+                      <a:tailEnd type="none" w="med" len="med"/>
+                    </a:lnT>
+                    <a:lnB w="6350" cap="flat" cmpd="sng" algn="ctr">
+                      <a:solidFill>
+                        <a:srgbClr val="CDCECB"/>
+                      </a:solidFill>
+                      <a:prstDash val="solid"/>
+                      <a:round/>
+                      <a:headEnd type="none" w="med" len="med"/>
+                      <a:tailEnd type="none" w="med" len="med"/>
+                    </a:lnB>
+                    <a:solidFill>
+                      <a:srgbClr val="FFFFFF"/>
+                    </a:solidFill>
+                  </a:tcPr>
+                </a:tc>
+                <a:tc>
+                  <a:txBody>
+                    <a:bodyPr/>
+                    <a:lstStyle/>
+                    <a:p>
+                      <a:pPr algn="r" indent="0" marL="0">
+                        <a:buNone/>
+                      </a:pPr>
+                      <a:r>
+                        <a:rPr lang="en-US" sz="900" dirty="0">
+                          <a:solidFill>
+                            <a:srgbClr val="3D3D3D"/>
+                          </a:solidFill>
+                          <a:latin typeface="맑은 고딕" pitchFamily="34" charset="0"/>
+                          <a:ea typeface="맑은 고딕" pitchFamily="34" charset="-122"/>
+                          <a:cs typeface="맑은 고딕" pitchFamily="34" charset="-120"/>
+                        </a:rPr>
+                        <a:t>26.7%</a:t>
+                      </a:r>
+                      <a:endParaRPr lang="en-US" sz="900" dirty="0">
+                        <a:latin typeface="맑은 고딕" charset="0"/>
+                        <a:ea typeface="맑은 고딕" charset="0"/>
+                        <a:cs typeface="맑은 고딕" charset="0"/>
+                      </a:endParaRPr>
+                    </a:p>
+                  </a:txBody>
+                  <a:tcPr marL="38100" marR="38100" marT="12700" marB="12700" anchor="ctr">
+                    <a:lnL w="6350" cap="flat" cmpd="sng" algn="ctr">
+                      <a:solidFill>
+                        <a:srgbClr val="CDCECB"/>
+                      </a:solidFill>
+                      <a:prstDash val="solid"/>
+                      <a:round/>
+                      <a:headEnd type="none" w="med" len="med"/>
+                      <a:tailEnd type="none" w="med" len="med"/>
+                    </a:lnL>
+                    <a:lnR w="6350" cap="flat" cmpd="sng" algn="ctr">
+                      <a:solidFill>
+                        <a:srgbClr val="CDCECB"/>
+                      </a:solidFill>
+                      <a:prstDash val="solid"/>
+                      <a:round/>
+                      <a:headEnd type="none" w="med" len="med"/>
+                      <a:tailEnd type="none" w="med" len="med"/>
+                    </a:lnR>
+                    <a:lnT w="6350" cap="flat" cmpd="sng" algn="ctr">
+                      <a:solidFill>
+                        <a:srgbClr val="CDCECB"/>
+                      </a:solidFill>
+                      <a:prstDash val="solid"/>
+                      <a:round/>
+                      <a:headEnd type="none" w="med" len="med"/>
+                      <a:tailEnd type="none" w="med" len="med"/>
+                    </a:lnT>
+                    <a:lnB w="6350" cap="flat" cmpd="sng" algn="ctr">
+                      <a:solidFill>
+                        <a:srgbClr val="CDCECB"/>
+                      </a:solidFill>
+                      <a:prstDash val="solid"/>
+                      <a:round/>
+                      <a:headEnd type="none" w="med" len="med"/>
+                      <a:tailEnd type="none" w="med" len="med"/>
+                    </a:lnB>
+                    <a:solidFill>
+                      <a:srgbClr val="FFFFFF"/>
+                    </a:solidFill>
+                  </a:tcPr>
+                </a:tc>
+                <a:tc>
+                  <a:txBody>
+                    <a:bodyPr/>
+                    <a:lstStyle/>
+                    <a:p>
+                      <a:pPr algn="r" indent="0" marL="0">
+                        <a:buNone/>
+                      </a:pPr>
+                      <a:r>
+                        <a:rPr lang="en-US" sz="900" dirty="0">
+                          <a:solidFill>
+                            <a:srgbClr val="3D3D3D"/>
+                          </a:solidFill>
+                          <a:latin typeface="맑은 고딕" pitchFamily="34" charset="0"/>
+                          <a:ea typeface="맑은 고딕" pitchFamily="34" charset="-122"/>
+                          <a:cs typeface="맑은 고딕" pitchFamily="34" charset="-120"/>
+                        </a:rPr>
+                        <a:t>1.97%·20.7년</a:t>
+                      </a:r>
+                      <a:endParaRPr lang="en-US" sz="900" dirty="0">
+                        <a:latin typeface="맑은 고딕" charset="0"/>
+                        <a:ea typeface="맑은 고딕" charset="0"/>
+                        <a:cs typeface="맑은 고딕" charset="0"/>
+                      </a:endParaRPr>
+                    </a:p>
+                  </a:txBody>
+                  <a:tcPr marL="38100" marR="38100" marT="12700" marB="12700" anchor="ctr">
+                    <a:lnL w="6350" cap="flat" cmpd="sng" algn="ctr">
+                      <a:solidFill>
+                        <a:srgbClr val="CDCECB"/>
+                      </a:solidFill>
+                      <a:prstDash val="solid"/>
+                      <a:round/>
+                      <a:headEnd type="none" w="med" len="med"/>
+                      <a:tailEnd type="none" w="med" len="med"/>
+                    </a:lnL>
+                    <a:lnR w="6350" cap="flat" cmpd="sng" algn="ctr">
+                      <a:solidFill>
+                        <a:srgbClr val="CDCECB"/>
+                      </a:solidFill>
+                      <a:prstDash val="solid"/>
+                      <a:round/>
+                      <a:headEnd type="none" w="med" len="med"/>
+                      <a:tailEnd type="none" w="med" len="med"/>
+                    </a:lnR>
+                    <a:lnT w="6350" cap="flat" cmpd="sng" algn="ctr">
+                      <a:solidFill>
+                        <a:srgbClr val="CDCECB"/>
+                      </a:solidFill>
+                      <a:prstDash val="solid"/>
+                      <a:round/>
+                      <a:headEnd type="none" w="med" len="med"/>
+                      <a:tailEnd type="none" w="med" len="med"/>
+                    </a:lnT>
+                    <a:lnB w="6350" cap="flat" cmpd="sng" algn="ctr">
+                      <a:solidFill>
+                        <a:srgbClr val="CDCECB"/>
+                      </a:solidFill>
+                      <a:prstDash val="solid"/>
+                      <a:round/>
+                      <a:headEnd type="none" w="med" len="med"/>
+                      <a:tailEnd type="none" w="med" len="med"/>
+                    </a:lnB>
+                    <a:solidFill>
+                      <a:srgbClr val="FFFFFF"/>
+                    </a:solidFill>
+                  </a:tcPr>
+                </a:tc>
+                <a:tc>
+                  <a:txBody>
+                    <a:bodyPr/>
+                    <a:lstStyle/>
+                    <a:p>
+                      <a:pPr algn="r" indent="0" marL="0">
+                        <a:buNone/>
+                      </a:pPr>
+                      <a:r>
+                        <a:rPr lang="en-US" sz="900" dirty="0">
+                          <a:solidFill>
+                            <a:srgbClr val="3D3D3D"/>
+                          </a:solidFill>
+                          <a:latin typeface="맑은 고딕" pitchFamily="34" charset="0"/>
+                          <a:ea typeface="맑은 고딕" pitchFamily="34" charset="-122"/>
+                          <a:cs typeface="맑은 고딕" pitchFamily="34" charset="-120"/>
+                        </a:rPr>
+                        <a:t>9,573원</a:t>
+                      </a:r>
+                      <a:endParaRPr lang="en-US" sz="900" dirty="0">
+                        <a:latin typeface="맑은 고딕" charset="0"/>
+                        <a:ea typeface="맑은 고딕" charset="0"/>
+                        <a:cs typeface="맑은 고딕" charset="0"/>
+                      </a:endParaRPr>
+                    </a:p>
+                  </a:txBody>
+                  <a:tcPr marL="38100" marR="38100" marT="12700" marB="12700" anchor="ctr">
+                    <a:lnL w="6350" cap="flat" cmpd="sng" algn="ctr">
+                      <a:solidFill>
+                        <a:srgbClr val="CDCECB"/>
+                      </a:solidFill>
+                      <a:prstDash val="solid"/>
+                      <a:round/>
+                      <a:headEnd type="none" w="med" len="med"/>
+                      <a:tailEnd type="none" w="med" len="med"/>
+                    </a:lnL>
+                    <a:lnR w="6350" cap="flat" cmpd="sng" algn="ctr">
+                      <a:solidFill>
+                        <a:srgbClr val="CDCECB"/>
+                      </a:solidFill>
+                      <a:prstDash val="solid"/>
+                      <a:round/>
+                      <a:headEnd type="none" w="med" len="med"/>
+                      <a:tailEnd type="none" w="med" len="med"/>
+                    </a:lnR>
+                    <a:lnT w="6350" cap="flat" cmpd="sng" algn="ctr">
+                      <a:solidFill>
+                        <a:srgbClr val="CDCECB"/>
+                      </a:solidFill>
+                      <a:prstDash val="solid"/>
+                      <a:round/>
+                      <a:headEnd type="none" w="med" len="med"/>
+                      <a:tailEnd type="none" w="med" len="med"/>
+                    </a:lnT>
+                    <a:lnB w="6350" cap="flat" cmpd="sng" algn="ctr">
+                      <a:solidFill>
+                        <a:srgbClr val="CDCECB"/>
+                      </a:solidFill>
+                      <a:prstDash val="solid"/>
+                      <a:round/>
+                      <a:headEnd type="none" w="med" len="med"/>
+                      <a:tailEnd type="none" w="med" len="med"/>
+                    </a:lnB>
+                    <a:solidFill>
+                      <a:srgbClr val="FFFFFF"/>
+                    </a:solidFill>
+                  </a:tcPr>
+                </a:tc>
+              </a:tr>
+              <a:tr h="238760">
                 <a:tc>
                   <a:txBody>
                     <a:bodyPr/>
@@ -12770,7 +13630,7 @@
                   </a:tcPr>
                 </a:tc>
               </a:tr>
-              <a:tr h="252805">
+              <a:tr h="238760">
                 <a:tc>
                   <a:txBody>
                     <a:bodyPr/>
@@ -13602,7 +14462,7 @@
                   </a:tcPr>
                 </a:tc>
               </a:tr>
-              <a:tr h="252805">
+              <a:tr h="238760">
                 <a:tc>
                   <a:txBody>
                     <a:bodyPr/>
@@ -14434,7 +15294,7 @@
                   </a:tcPr>
                 </a:tc>
               </a:tr>
-              <a:tr h="252805">
+              <a:tr h="238760">
                 <a:tc>
                   <a:txBody>
                     <a:bodyPr/>
@@ -15266,7 +16126,7 @@
                   </a:tcPr>
                 </a:tc>
               </a:tr>
-              <a:tr h="252805">
+              <a:tr h="238760">
                 <a:tc>
                   <a:txBody>
                     <a:bodyPr/>
@@ -16098,7 +16958,7 @@
                   </a:tcPr>
                 </a:tc>
               </a:tr>
-              <a:tr h="252805">
+              <a:tr h="238760">
                 <a:tc>
                   <a:txBody>
                     <a:bodyPr/>
@@ -16930,7 +17790,7 @@
                   </a:tcPr>
                 </a:tc>
               </a:tr>
-              <a:tr h="252805">
+              <a:tr h="238760">
                 <a:tc>
                   <a:txBody>
                     <a:bodyPr/>
@@ -23652,7 +24512,7 @@
                 <a:ea typeface="맑은 고딕" pitchFamily="34" charset="-122"/>
                 <a:cs typeface="맑은 고딕" pitchFamily="34" charset="-120"/>
               </a:rPr>
-              <a:t>발행사가 공시한 공정가격이 6,682~7,612원입니다. 액면 1만원을 내고 사는 시점의 이론 값어치가 그것뿐이라는 뜻입니다. 나머지 원화 13종은 7,924원 이상입니다.</a:t>
+              <a:t>발행사가 공시한 공정가격이 6,682~7,612원입니다. 액면 1만원을 내고 사는 시점의 이론 값어치가 그것뿐이라는 뜻입니다. 나머지 원화 14종은 7,924원 이상입니다.</a:t>
             </a:r>
             <a:endParaRPr lang="en-US" sz="950" dirty="0"/>
           </a:p>
@@ -23733,7 +24593,7 @@
                 <a:ea typeface="맑은 고딕" pitchFamily="34" charset="-122"/>
                 <a:cs typeface="맑은 고딕" pitchFamily="34" charset="-120"/>
               </a:rPr>
-              <a:t>41.2~49.3%. 나머지 13종 평균은 17.9%입니다. 손실이 나면 평균 85.9%를 잃습니다.</a:t>
+              <a:t>41.2~49.3%. 나머지 14종 평균은 18.2%입니다. 손실이 나면 평균 85.9%를 잃습니다.</a:t>
             </a:r>
             <a:endParaRPr lang="en-US" sz="950" dirty="0"/>
           </a:p>
@@ -26301,7 +27161,7 @@
                 <a:ea typeface="맑은 고딕" pitchFamily="34" charset="-122"/>
                 <a:cs typeface="맑은 고딕" pitchFamily="34" charset="-120"/>
               </a:rPr>
-              <a:t>조건·공정가격·적용 변동성·상관계수·백테스트(A)는 일괄신고추가서류(접수번호 20260911000507, 2026.09.11 공시) 원문에서 그대로 옮겼습니다. 손실 확률(B)은 그 공시 변동성과 상관계수로 같은 조건을 10만 번 다시 돌린 값이며, 공시된 수치가 아닙니다. 수익률은 확정이 아니라 조건 충족 시의 상한입니다.</a:t>
+              <a:t>조건·공정가격·적용 변동성·상관계수·백테스트(A)는 일괄신고추가서류(접수번호 20260911000507 · 20260914000166) 원문에서 그대로 옮겼습니다. 손실 확률(B)은 그 공시 변동성과 상관계수로 같은 조건을 10만 번 다시 돌린 값이며, 공시된 수치가 아닙니다. 수익률은 확정이 아니라 조건 충족 시의 상한입니다.</a:t>
             </a:r>
             <a:endParaRPr lang="en-US" sz="850" dirty="0"/>
           </a:p>

--- a/els-sales-deck.pptx
+++ b/els-sales-deck.pptx
@@ -3687,13 +3687,13 @@
                 <a:gridCol w="2441448"/>
                 <a:gridCol w="658368"/>
                 <a:gridCol w="640080"/>
-                <a:gridCol w="1417320"/>
+                <a:gridCol w="1280160"/>
                 <a:gridCol w="457200"/>
                 <a:gridCol w="1051560"/>
                 <a:gridCol w="603504"/>
-                <a:gridCol w="658368"/>
-                <a:gridCol w="658368"/>
-                <a:gridCol w="1005840"/>
+                <a:gridCol w="731520"/>
+                <a:gridCol w="731520"/>
+                <a:gridCol w="996696"/>
                 <a:gridCol w="862279"/>
               </a:tblGrid>
               <a:tr h="226194">
@@ -4342,7 +4342,7 @@
                           <a:ea typeface="맑은 고딕" pitchFamily="34" charset="-122"/>
                           <a:cs typeface="맑은 고딕" pitchFamily="34" charset="-120"/>
                         </a:rPr>
-                        <a:t>1차에</a:t>
+                        <a:t>B. 1차에</a:t>
                       </a:r>
                       <a:endParaRPr lang="en-US" sz="900" dirty="0">
                         <a:latin typeface="맑은 고딕" charset="0"/>
@@ -4431,7 +4431,7 @@
                           <a:ea typeface="맑은 고딕" pitchFamily="34" charset="-122"/>
                           <a:cs typeface="맑은 고딕" pitchFamily="34" charset="-120"/>
                         </a:rPr>
-                        <a:t>만기까지</a:t>
+                        <a:t>B. 만기까지</a:t>
                       </a:r>
                       <a:endParaRPr lang="en-US" sz="900" dirty="0">
                         <a:latin typeface="맑은 고딕" charset="0"/>

--- a/els-sales-deck.pptx
+++ b/els-sales-deck.pptx
@@ -134,7 +134,7 @@
               <c:strCache>
                 <c:ptCount val="1"/>
                 <c:pt idx="0">
-                  <c:v>추천 3종</c:v>
+                  <c:v>제38133회 KOSPI200</c:v>
                 </c:pt>
               </c:strCache>
             </c:strRef>
@@ -247,7 +247,7 @@
                   <c:v/>
                 </c:pt>
                 <c:pt idx="3">
-                  <c:v>16</c:v>
+                  <c:v/>
                 </c:pt>
                 <c:pt idx="4">
                   <c:v/>
@@ -280,7 +280,7 @@
                   <c:v/>
                 </c:pt>
                 <c:pt idx="14">
-                  <c:v>25</c:v>
+                  <c:v/>
                 </c:pt>
                 <c:pt idx="15">
                   <c:v/>
@@ -308,7 +308,7 @@
               <c:strCache>
                 <c:ptCount val="1"/>
                 <c:pt idx="0">
-                  <c:v>그 외</c:v>
+                  <c:v>제38134회 EuroStoxx50·S&amp;P500·KOSPI200</c:v>
                 </c:pt>
               </c:strCache>
             </c:strRef>
@@ -418,40 +418,40 @@
                   <c:v>10.3</c:v>
                 </c:pt>
                 <c:pt idx="2">
-                  <c:v>15.1</c:v>
+                  <c:v/>
                 </c:pt>
                 <c:pt idx="3">
                   <c:v/>
                 </c:pt>
                 <c:pt idx="4">
-                  <c:v>11</c:v>
+                  <c:v/>
                 </c:pt>
                 <c:pt idx="5">
-                  <c:v>11.6</c:v>
+                  <c:v/>
                 </c:pt>
                 <c:pt idx="6">
-                  <c:v>11.4</c:v>
+                  <c:v/>
                 </c:pt>
                 <c:pt idx="7">
-                  <c:v>15.5</c:v>
+                  <c:v/>
                 </c:pt>
                 <c:pt idx="8">
-                  <c:v>12.1</c:v>
+                  <c:v/>
                 </c:pt>
                 <c:pt idx="9">
-                  <c:v>18.4</c:v>
+                  <c:v/>
                 </c:pt>
                 <c:pt idx="10">
-                  <c:v>10</c:v>
+                  <c:v/>
                 </c:pt>
                 <c:pt idx="11">
-                  <c:v>12</c:v>
+                  <c:v/>
                 </c:pt>
                 <c:pt idx="12">
-                  <c:v>21.5</c:v>
+                  <c:v/>
                 </c:pt>
                 <c:pt idx="13">
-                  <c:v>14.7</c:v>
+                  <c:v/>
                 </c:pt>
                 <c:pt idx="14">
                   <c:v/>
@@ -482,7 +482,2269 @@
               <c:strCache>
                 <c:ptCount val="1"/>
                 <c:pt idx="0">
-                  <c:v>권하지 않는 4종</c:v>
+                  <c:v>제38139회 삼성전자·SK하이닉스</c:v>
+                </c:pt>
+              </c:strCache>
+            </c:strRef>
+          </c:tx>
+          <c:spPr>
+            <a:solidFill>
+              <a:srgbClr val="9AA6B2"/>
+            </a:solidFill>
+            <a:ln>
+              <a:noFill/>
+            </a:ln>
+            <a:effectLst/>
+          </c:spPr>
+          <c:marker>
+            <c:symbol val="circle"/>
+            <c:size val="9"/>
+            <c:spPr>
+              <a:solidFill>
+                <a:srgbClr val="9AA6B2"/>
+              </a:solidFill>
+              <a:ln w="9525" cap="flat">
+                <a:solidFill>
+                  <a:srgbClr val="9AA6B2"/>
+                </a:solidFill>
+                <a:prstDash val="solid"/>
+                <a:round/>
+              </a:ln>
+              <a:effectLst/>
+            </c:spPr>
+          </c:marker>
+          <c:xVal>
+            <c:numRef>
+              <c:f>Sheet1!$A$2:$A$20</c:f>
+              <c:numCache>
+                <c:formatCode>General</c:formatCode>
+                <c:ptCount val="19"/>
+                <c:pt idx="0">
+                  <c:v>9.5</c:v>
+                </c:pt>
+                <c:pt idx="1">
+                  <c:v>10</c:v>
+                </c:pt>
+                <c:pt idx="2">
+                  <c:v>11.1</c:v>
+                </c:pt>
+                <c:pt idx="3">
+                  <c:v>11.4</c:v>
+                </c:pt>
+                <c:pt idx="4">
+                  <c:v>12.3</c:v>
+                </c:pt>
+                <c:pt idx="5">
+                  <c:v>13.3</c:v>
+                </c:pt>
+                <c:pt idx="6">
+                  <c:v>13.8</c:v>
+                </c:pt>
+                <c:pt idx="7">
+                  <c:v>13.8</c:v>
+                </c:pt>
+                <c:pt idx="8">
+                  <c:v>15.2</c:v>
+                </c:pt>
+                <c:pt idx="9">
+                  <c:v>16.5</c:v>
+                </c:pt>
+                <c:pt idx="10">
+                  <c:v>19.2</c:v>
+                </c:pt>
+                <c:pt idx="11">
+                  <c:v>21.1</c:v>
+                </c:pt>
+                <c:pt idx="12">
+                  <c:v>21.9</c:v>
+                </c:pt>
+                <c:pt idx="13">
+                  <c:v>24.1</c:v>
+                </c:pt>
+                <c:pt idx="14">
+                  <c:v>24.3</c:v>
+                </c:pt>
+                <c:pt idx="15">
+                  <c:v>30.5</c:v>
+                </c:pt>
+                <c:pt idx="16">
+                  <c:v>38.3</c:v>
+                </c:pt>
+                <c:pt idx="17">
+                  <c:v>47.9</c:v>
+                </c:pt>
+                <c:pt idx="18">
+                  <c:v>50.2</c:v>
+                </c:pt>
+              </c:numCache>
+            </c:numRef>
+          </c:xVal>
+          <c:yVal>
+            <c:numRef>
+              <c:f>Sheet1!$D$2:$D$20</c:f>
+              <c:numCache>
+                <c:formatCode>General</c:formatCode>
+                <c:ptCount val="19"/>
+                <c:pt idx="0">
+                  <c:v/>
+                </c:pt>
+                <c:pt idx="1">
+                  <c:v/>
+                </c:pt>
+                <c:pt idx="2">
+                  <c:v>15.1</c:v>
+                </c:pt>
+                <c:pt idx="3">
+                  <c:v/>
+                </c:pt>
+                <c:pt idx="4">
+                  <c:v/>
+                </c:pt>
+                <c:pt idx="5">
+                  <c:v/>
+                </c:pt>
+                <c:pt idx="6">
+                  <c:v/>
+                </c:pt>
+                <c:pt idx="7">
+                  <c:v/>
+                </c:pt>
+                <c:pt idx="8">
+                  <c:v/>
+                </c:pt>
+                <c:pt idx="9">
+                  <c:v/>
+                </c:pt>
+                <c:pt idx="10">
+                  <c:v/>
+                </c:pt>
+                <c:pt idx="11">
+                  <c:v/>
+                </c:pt>
+                <c:pt idx="12">
+                  <c:v/>
+                </c:pt>
+                <c:pt idx="13">
+                  <c:v/>
+                </c:pt>
+                <c:pt idx="14">
+                  <c:v/>
+                </c:pt>
+                <c:pt idx="15">
+                  <c:v/>
+                </c:pt>
+                <c:pt idx="16">
+                  <c:v/>
+                </c:pt>
+                <c:pt idx="17">
+                  <c:v/>
+                </c:pt>
+                <c:pt idx="18">
+                  <c:v/>
+                </c:pt>
+              </c:numCache>
+            </c:numRef>
+          </c:yVal>
+          <c:smooth val="0"/>
+        </c:ser>
+        <c:ser>
+          <c:idx val="3"/>
+          <c:order val="3"/>
+          <c:tx>
+            <c:strRef>
+              <c:f>Sheet1!$E$1</c:f>
+              <c:strCache>
+                <c:ptCount val="1"/>
+                <c:pt idx="0">
+                  <c:v>제38141회 KOSPI200·SK하이닉스</c:v>
+                </c:pt>
+              </c:strCache>
+            </c:strRef>
+          </c:tx>
+          <c:spPr>
+            <a:solidFill>
+              <a:srgbClr val="F58220"/>
+            </a:solidFill>
+            <a:ln>
+              <a:noFill/>
+            </a:ln>
+            <a:effectLst/>
+          </c:spPr>
+          <c:marker>
+            <c:symbol val="circle"/>
+            <c:size val="9"/>
+            <c:spPr>
+              <a:solidFill>
+                <a:srgbClr val="F58220"/>
+              </a:solidFill>
+              <a:ln w="9525" cap="flat">
+                <a:solidFill>
+                  <a:srgbClr val="F58220"/>
+                </a:solidFill>
+                <a:prstDash val="solid"/>
+                <a:round/>
+              </a:ln>
+              <a:effectLst/>
+            </c:spPr>
+          </c:marker>
+          <c:xVal>
+            <c:numRef>
+              <c:f>Sheet1!$A$2:$A$20</c:f>
+              <c:numCache>
+                <c:formatCode>General</c:formatCode>
+                <c:ptCount val="19"/>
+                <c:pt idx="0">
+                  <c:v>9.5</c:v>
+                </c:pt>
+                <c:pt idx="1">
+                  <c:v>10</c:v>
+                </c:pt>
+                <c:pt idx="2">
+                  <c:v>11.1</c:v>
+                </c:pt>
+                <c:pt idx="3">
+                  <c:v>11.4</c:v>
+                </c:pt>
+                <c:pt idx="4">
+                  <c:v>12.3</c:v>
+                </c:pt>
+                <c:pt idx="5">
+                  <c:v>13.3</c:v>
+                </c:pt>
+                <c:pt idx="6">
+                  <c:v>13.8</c:v>
+                </c:pt>
+                <c:pt idx="7">
+                  <c:v>13.8</c:v>
+                </c:pt>
+                <c:pt idx="8">
+                  <c:v>15.2</c:v>
+                </c:pt>
+                <c:pt idx="9">
+                  <c:v>16.5</c:v>
+                </c:pt>
+                <c:pt idx="10">
+                  <c:v>19.2</c:v>
+                </c:pt>
+                <c:pt idx="11">
+                  <c:v>21.1</c:v>
+                </c:pt>
+                <c:pt idx="12">
+                  <c:v>21.9</c:v>
+                </c:pt>
+                <c:pt idx="13">
+                  <c:v>24.1</c:v>
+                </c:pt>
+                <c:pt idx="14">
+                  <c:v>24.3</c:v>
+                </c:pt>
+                <c:pt idx="15">
+                  <c:v>30.5</c:v>
+                </c:pt>
+                <c:pt idx="16">
+                  <c:v>38.3</c:v>
+                </c:pt>
+                <c:pt idx="17">
+                  <c:v>47.9</c:v>
+                </c:pt>
+                <c:pt idx="18">
+                  <c:v>50.2</c:v>
+                </c:pt>
+              </c:numCache>
+            </c:numRef>
+          </c:xVal>
+          <c:yVal>
+            <c:numRef>
+              <c:f>Sheet1!$E$2:$E$20</c:f>
+              <c:numCache>
+                <c:formatCode>General</c:formatCode>
+                <c:ptCount val="19"/>
+                <c:pt idx="0">
+                  <c:v/>
+                </c:pt>
+                <c:pt idx="1">
+                  <c:v/>
+                </c:pt>
+                <c:pt idx="2">
+                  <c:v/>
+                </c:pt>
+                <c:pt idx="3">
+                  <c:v>16</c:v>
+                </c:pt>
+                <c:pt idx="4">
+                  <c:v/>
+                </c:pt>
+                <c:pt idx="5">
+                  <c:v/>
+                </c:pt>
+                <c:pt idx="6">
+                  <c:v/>
+                </c:pt>
+                <c:pt idx="7">
+                  <c:v/>
+                </c:pt>
+                <c:pt idx="8">
+                  <c:v/>
+                </c:pt>
+                <c:pt idx="9">
+                  <c:v/>
+                </c:pt>
+                <c:pt idx="10">
+                  <c:v/>
+                </c:pt>
+                <c:pt idx="11">
+                  <c:v/>
+                </c:pt>
+                <c:pt idx="12">
+                  <c:v/>
+                </c:pt>
+                <c:pt idx="13">
+                  <c:v/>
+                </c:pt>
+                <c:pt idx="14">
+                  <c:v/>
+                </c:pt>
+                <c:pt idx="15">
+                  <c:v/>
+                </c:pt>
+                <c:pt idx="16">
+                  <c:v/>
+                </c:pt>
+                <c:pt idx="17">
+                  <c:v/>
+                </c:pt>
+                <c:pt idx="18">
+                  <c:v/>
+                </c:pt>
+              </c:numCache>
+            </c:numRef>
+          </c:yVal>
+          <c:smooth val="0"/>
+        </c:ser>
+        <c:ser>
+          <c:idx val="4"/>
+          <c:order val="4"/>
+          <c:tx>
+            <c:strRef>
+              <c:f>Sheet1!$F$1</c:f>
+              <c:strCache>
+                <c:ptCount val="1"/>
+                <c:pt idx="0">
+                  <c:v>제38135회 EuroStoxx50·KOSPI200·Nikkei225</c:v>
+                </c:pt>
+              </c:strCache>
+            </c:strRef>
+          </c:tx>
+          <c:spPr>
+            <a:solidFill>
+              <a:srgbClr val="9AA6B2"/>
+            </a:solidFill>
+            <a:ln>
+              <a:noFill/>
+            </a:ln>
+            <a:effectLst/>
+          </c:spPr>
+          <c:marker>
+            <c:symbol val="circle"/>
+            <c:size val="9"/>
+            <c:spPr>
+              <a:solidFill>
+                <a:srgbClr val="9AA6B2"/>
+              </a:solidFill>
+              <a:ln w="9525" cap="flat">
+                <a:solidFill>
+                  <a:srgbClr val="9AA6B2"/>
+                </a:solidFill>
+                <a:prstDash val="solid"/>
+                <a:round/>
+              </a:ln>
+              <a:effectLst/>
+            </c:spPr>
+          </c:marker>
+          <c:xVal>
+            <c:numRef>
+              <c:f>Sheet1!$A$2:$A$20</c:f>
+              <c:numCache>
+                <c:formatCode>General</c:formatCode>
+                <c:ptCount val="19"/>
+                <c:pt idx="0">
+                  <c:v>9.5</c:v>
+                </c:pt>
+                <c:pt idx="1">
+                  <c:v>10</c:v>
+                </c:pt>
+                <c:pt idx="2">
+                  <c:v>11.1</c:v>
+                </c:pt>
+                <c:pt idx="3">
+                  <c:v>11.4</c:v>
+                </c:pt>
+                <c:pt idx="4">
+                  <c:v>12.3</c:v>
+                </c:pt>
+                <c:pt idx="5">
+                  <c:v>13.3</c:v>
+                </c:pt>
+                <c:pt idx="6">
+                  <c:v>13.8</c:v>
+                </c:pt>
+                <c:pt idx="7">
+                  <c:v>13.8</c:v>
+                </c:pt>
+                <c:pt idx="8">
+                  <c:v>15.2</c:v>
+                </c:pt>
+                <c:pt idx="9">
+                  <c:v>16.5</c:v>
+                </c:pt>
+                <c:pt idx="10">
+                  <c:v>19.2</c:v>
+                </c:pt>
+                <c:pt idx="11">
+                  <c:v>21.1</c:v>
+                </c:pt>
+                <c:pt idx="12">
+                  <c:v>21.9</c:v>
+                </c:pt>
+                <c:pt idx="13">
+                  <c:v>24.1</c:v>
+                </c:pt>
+                <c:pt idx="14">
+                  <c:v>24.3</c:v>
+                </c:pt>
+                <c:pt idx="15">
+                  <c:v>30.5</c:v>
+                </c:pt>
+                <c:pt idx="16">
+                  <c:v>38.3</c:v>
+                </c:pt>
+                <c:pt idx="17">
+                  <c:v>47.9</c:v>
+                </c:pt>
+                <c:pt idx="18">
+                  <c:v>50.2</c:v>
+                </c:pt>
+              </c:numCache>
+            </c:numRef>
+          </c:xVal>
+          <c:yVal>
+            <c:numRef>
+              <c:f>Sheet1!$F$2:$F$20</c:f>
+              <c:numCache>
+                <c:formatCode>General</c:formatCode>
+                <c:ptCount val="19"/>
+                <c:pt idx="0">
+                  <c:v/>
+                </c:pt>
+                <c:pt idx="1">
+                  <c:v/>
+                </c:pt>
+                <c:pt idx="2">
+                  <c:v/>
+                </c:pt>
+                <c:pt idx="3">
+                  <c:v/>
+                </c:pt>
+                <c:pt idx="4">
+                  <c:v>11</c:v>
+                </c:pt>
+                <c:pt idx="5">
+                  <c:v/>
+                </c:pt>
+                <c:pt idx="6">
+                  <c:v/>
+                </c:pt>
+                <c:pt idx="7">
+                  <c:v/>
+                </c:pt>
+                <c:pt idx="8">
+                  <c:v/>
+                </c:pt>
+                <c:pt idx="9">
+                  <c:v/>
+                </c:pt>
+                <c:pt idx="10">
+                  <c:v/>
+                </c:pt>
+                <c:pt idx="11">
+                  <c:v/>
+                </c:pt>
+                <c:pt idx="12">
+                  <c:v/>
+                </c:pt>
+                <c:pt idx="13">
+                  <c:v/>
+                </c:pt>
+                <c:pt idx="14">
+                  <c:v/>
+                </c:pt>
+                <c:pt idx="15">
+                  <c:v/>
+                </c:pt>
+                <c:pt idx="16">
+                  <c:v/>
+                </c:pt>
+                <c:pt idx="17">
+                  <c:v/>
+                </c:pt>
+                <c:pt idx="18">
+                  <c:v/>
+                </c:pt>
+              </c:numCache>
+            </c:numRef>
+          </c:yVal>
+          <c:smooth val="0"/>
+        </c:ser>
+        <c:ser>
+          <c:idx val="5"/>
+          <c:order val="5"/>
+          <c:tx>
+            <c:strRef>
+              <c:f>Sheet1!$G$1</c:f>
+              <c:strCache>
+                <c:ptCount val="1"/>
+                <c:pt idx="0">
+                  <c:v>제38137회 KOSPI200·HSCEI·Nikkei225</c:v>
+                </c:pt>
+              </c:strCache>
+            </c:strRef>
+          </c:tx>
+          <c:spPr>
+            <a:solidFill>
+              <a:srgbClr val="9AA6B2"/>
+            </a:solidFill>
+            <a:ln>
+              <a:noFill/>
+            </a:ln>
+            <a:effectLst/>
+          </c:spPr>
+          <c:marker>
+            <c:symbol val="circle"/>
+            <c:size val="9"/>
+            <c:spPr>
+              <a:solidFill>
+                <a:srgbClr val="9AA6B2"/>
+              </a:solidFill>
+              <a:ln w="9525" cap="flat">
+                <a:solidFill>
+                  <a:srgbClr val="9AA6B2"/>
+                </a:solidFill>
+                <a:prstDash val="solid"/>
+                <a:round/>
+              </a:ln>
+              <a:effectLst/>
+            </c:spPr>
+          </c:marker>
+          <c:xVal>
+            <c:numRef>
+              <c:f>Sheet1!$A$2:$A$20</c:f>
+              <c:numCache>
+                <c:formatCode>General</c:formatCode>
+                <c:ptCount val="19"/>
+                <c:pt idx="0">
+                  <c:v>9.5</c:v>
+                </c:pt>
+                <c:pt idx="1">
+                  <c:v>10</c:v>
+                </c:pt>
+                <c:pt idx="2">
+                  <c:v>11.1</c:v>
+                </c:pt>
+                <c:pt idx="3">
+                  <c:v>11.4</c:v>
+                </c:pt>
+                <c:pt idx="4">
+                  <c:v>12.3</c:v>
+                </c:pt>
+                <c:pt idx="5">
+                  <c:v>13.3</c:v>
+                </c:pt>
+                <c:pt idx="6">
+                  <c:v>13.8</c:v>
+                </c:pt>
+                <c:pt idx="7">
+                  <c:v>13.8</c:v>
+                </c:pt>
+                <c:pt idx="8">
+                  <c:v>15.2</c:v>
+                </c:pt>
+                <c:pt idx="9">
+                  <c:v>16.5</c:v>
+                </c:pt>
+                <c:pt idx="10">
+                  <c:v>19.2</c:v>
+                </c:pt>
+                <c:pt idx="11">
+                  <c:v>21.1</c:v>
+                </c:pt>
+                <c:pt idx="12">
+                  <c:v>21.9</c:v>
+                </c:pt>
+                <c:pt idx="13">
+                  <c:v>24.1</c:v>
+                </c:pt>
+                <c:pt idx="14">
+                  <c:v>24.3</c:v>
+                </c:pt>
+                <c:pt idx="15">
+                  <c:v>30.5</c:v>
+                </c:pt>
+                <c:pt idx="16">
+                  <c:v>38.3</c:v>
+                </c:pt>
+                <c:pt idx="17">
+                  <c:v>47.9</c:v>
+                </c:pt>
+                <c:pt idx="18">
+                  <c:v>50.2</c:v>
+                </c:pt>
+              </c:numCache>
+            </c:numRef>
+          </c:xVal>
+          <c:yVal>
+            <c:numRef>
+              <c:f>Sheet1!$G$2:$G$20</c:f>
+              <c:numCache>
+                <c:formatCode>General</c:formatCode>
+                <c:ptCount val="19"/>
+                <c:pt idx="0">
+                  <c:v/>
+                </c:pt>
+                <c:pt idx="1">
+                  <c:v/>
+                </c:pt>
+                <c:pt idx="2">
+                  <c:v/>
+                </c:pt>
+                <c:pt idx="3">
+                  <c:v/>
+                </c:pt>
+                <c:pt idx="4">
+                  <c:v/>
+                </c:pt>
+                <c:pt idx="5">
+                  <c:v>11.6</c:v>
+                </c:pt>
+                <c:pt idx="6">
+                  <c:v/>
+                </c:pt>
+                <c:pt idx="7">
+                  <c:v/>
+                </c:pt>
+                <c:pt idx="8">
+                  <c:v/>
+                </c:pt>
+                <c:pt idx="9">
+                  <c:v/>
+                </c:pt>
+                <c:pt idx="10">
+                  <c:v/>
+                </c:pt>
+                <c:pt idx="11">
+                  <c:v/>
+                </c:pt>
+                <c:pt idx="12">
+                  <c:v/>
+                </c:pt>
+                <c:pt idx="13">
+                  <c:v/>
+                </c:pt>
+                <c:pt idx="14">
+                  <c:v/>
+                </c:pt>
+                <c:pt idx="15">
+                  <c:v/>
+                </c:pt>
+                <c:pt idx="16">
+                  <c:v/>
+                </c:pt>
+                <c:pt idx="17">
+                  <c:v/>
+                </c:pt>
+                <c:pt idx="18">
+                  <c:v/>
+                </c:pt>
+              </c:numCache>
+            </c:numRef>
+          </c:yVal>
+          <c:smooth val="0"/>
+        </c:ser>
+        <c:ser>
+          <c:idx val="6"/>
+          <c:order val="6"/>
+          <c:tx>
+            <c:strRef>
+              <c:f>Sheet1!$H$1</c:f>
+              <c:strCache>
+                <c:ptCount val="1"/>
+                <c:pt idx="0">
+                  <c:v>제38136회 KOSPI200</c:v>
+                </c:pt>
+              </c:strCache>
+            </c:strRef>
+          </c:tx>
+          <c:spPr>
+            <a:solidFill>
+              <a:srgbClr val="9AA6B2"/>
+            </a:solidFill>
+            <a:ln>
+              <a:noFill/>
+            </a:ln>
+            <a:effectLst/>
+          </c:spPr>
+          <c:marker>
+            <c:symbol val="circle"/>
+            <c:size val="9"/>
+            <c:spPr>
+              <a:solidFill>
+                <a:srgbClr val="9AA6B2"/>
+              </a:solidFill>
+              <a:ln w="9525" cap="flat">
+                <a:solidFill>
+                  <a:srgbClr val="9AA6B2"/>
+                </a:solidFill>
+                <a:prstDash val="solid"/>
+                <a:round/>
+              </a:ln>
+              <a:effectLst/>
+            </c:spPr>
+          </c:marker>
+          <c:xVal>
+            <c:numRef>
+              <c:f>Sheet1!$A$2:$A$20</c:f>
+              <c:numCache>
+                <c:formatCode>General</c:formatCode>
+                <c:ptCount val="19"/>
+                <c:pt idx="0">
+                  <c:v>9.5</c:v>
+                </c:pt>
+                <c:pt idx="1">
+                  <c:v>10</c:v>
+                </c:pt>
+                <c:pt idx="2">
+                  <c:v>11.1</c:v>
+                </c:pt>
+                <c:pt idx="3">
+                  <c:v>11.4</c:v>
+                </c:pt>
+                <c:pt idx="4">
+                  <c:v>12.3</c:v>
+                </c:pt>
+                <c:pt idx="5">
+                  <c:v>13.3</c:v>
+                </c:pt>
+                <c:pt idx="6">
+                  <c:v>13.8</c:v>
+                </c:pt>
+                <c:pt idx="7">
+                  <c:v>13.8</c:v>
+                </c:pt>
+                <c:pt idx="8">
+                  <c:v>15.2</c:v>
+                </c:pt>
+                <c:pt idx="9">
+                  <c:v>16.5</c:v>
+                </c:pt>
+                <c:pt idx="10">
+                  <c:v>19.2</c:v>
+                </c:pt>
+                <c:pt idx="11">
+                  <c:v>21.1</c:v>
+                </c:pt>
+                <c:pt idx="12">
+                  <c:v>21.9</c:v>
+                </c:pt>
+                <c:pt idx="13">
+                  <c:v>24.1</c:v>
+                </c:pt>
+                <c:pt idx="14">
+                  <c:v>24.3</c:v>
+                </c:pt>
+                <c:pt idx="15">
+                  <c:v>30.5</c:v>
+                </c:pt>
+                <c:pt idx="16">
+                  <c:v>38.3</c:v>
+                </c:pt>
+                <c:pt idx="17">
+                  <c:v>47.9</c:v>
+                </c:pt>
+                <c:pt idx="18">
+                  <c:v>50.2</c:v>
+                </c:pt>
+              </c:numCache>
+            </c:numRef>
+          </c:xVal>
+          <c:yVal>
+            <c:numRef>
+              <c:f>Sheet1!$H$2:$H$20</c:f>
+              <c:numCache>
+                <c:formatCode>General</c:formatCode>
+                <c:ptCount val="19"/>
+                <c:pt idx="0">
+                  <c:v/>
+                </c:pt>
+                <c:pt idx="1">
+                  <c:v/>
+                </c:pt>
+                <c:pt idx="2">
+                  <c:v/>
+                </c:pt>
+                <c:pt idx="3">
+                  <c:v/>
+                </c:pt>
+                <c:pt idx="4">
+                  <c:v/>
+                </c:pt>
+                <c:pt idx="5">
+                  <c:v/>
+                </c:pt>
+                <c:pt idx="6">
+                  <c:v>11.4</c:v>
+                </c:pt>
+                <c:pt idx="7">
+                  <c:v/>
+                </c:pt>
+                <c:pt idx="8">
+                  <c:v/>
+                </c:pt>
+                <c:pt idx="9">
+                  <c:v/>
+                </c:pt>
+                <c:pt idx="10">
+                  <c:v/>
+                </c:pt>
+                <c:pt idx="11">
+                  <c:v/>
+                </c:pt>
+                <c:pt idx="12">
+                  <c:v/>
+                </c:pt>
+                <c:pt idx="13">
+                  <c:v/>
+                </c:pt>
+                <c:pt idx="14">
+                  <c:v/>
+                </c:pt>
+                <c:pt idx="15">
+                  <c:v/>
+                </c:pt>
+                <c:pt idx="16">
+                  <c:v/>
+                </c:pt>
+                <c:pt idx="17">
+                  <c:v/>
+                </c:pt>
+                <c:pt idx="18">
+                  <c:v/>
+                </c:pt>
+              </c:numCache>
+            </c:numRef>
+          </c:yVal>
+          <c:smooth val="0"/>
+        </c:ser>
+        <c:ser>
+          <c:idx val="7"/>
+          <c:order val="7"/>
+          <c:tx>
+            <c:strRef>
+              <c:f>Sheet1!$I$1</c:f>
+              <c:strCache>
+                <c:ptCount val="1"/>
+                <c:pt idx="0">
+                  <c:v>제38140회 KOSPI200·삼성전자</c:v>
+                </c:pt>
+              </c:strCache>
+            </c:strRef>
+          </c:tx>
+          <c:spPr>
+            <a:solidFill>
+              <a:srgbClr val="9AA6B2"/>
+            </a:solidFill>
+            <a:ln>
+              <a:noFill/>
+            </a:ln>
+            <a:effectLst/>
+          </c:spPr>
+          <c:marker>
+            <c:symbol val="circle"/>
+            <c:size val="9"/>
+            <c:spPr>
+              <a:solidFill>
+                <a:srgbClr val="9AA6B2"/>
+              </a:solidFill>
+              <a:ln w="9525" cap="flat">
+                <a:solidFill>
+                  <a:srgbClr val="9AA6B2"/>
+                </a:solidFill>
+                <a:prstDash val="solid"/>
+                <a:round/>
+              </a:ln>
+              <a:effectLst/>
+            </c:spPr>
+          </c:marker>
+          <c:xVal>
+            <c:numRef>
+              <c:f>Sheet1!$A$2:$A$20</c:f>
+              <c:numCache>
+                <c:formatCode>General</c:formatCode>
+                <c:ptCount val="19"/>
+                <c:pt idx="0">
+                  <c:v>9.5</c:v>
+                </c:pt>
+                <c:pt idx="1">
+                  <c:v>10</c:v>
+                </c:pt>
+                <c:pt idx="2">
+                  <c:v>11.1</c:v>
+                </c:pt>
+                <c:pt idx="3">
+                  <c:v>11.4</c:v>
+                </c:pt>
+                <c:pt idx="4">
+                  <c:v>12.3</c:v>
+                </c:pt>
+                <c:pt idx="5">
+                  <c:v>13.3</c:v>
+                </c:pt>
+                <c:pt idx="6">
+                  <c:v>13.8</c:v>
+                </c:pt>
+                <c:pt idx="7">
+                  <c:v>13.8</c:v>
+                </c:pt>
+                <c:pt idx="8">
+                  <c:v>15.2</c:v>
+                </c:pt>
+                <c:pt idx="9">
+                  <c:v>16.5</c:v>
+                </c:pt>
+                <c:pt idx="10">
+                  <c:v>19.2</c:v>
+                </c:pt>
+                <c:pt idx="11">
+                  <c:v>21.1</c:v>
+                </c:pt>
+                <c:pt idx="12">
+                  <c:v>21.9</c:v>
+                </c:pt>
+                <c:pt idx="13">
+                  <c:v>24.1</c:v>
+                </c:pt>
+                <c:pt idx="14">
+                  <c:v>24.3</c:v>
+                </c:pt>
+                <c:pt idx="15">
+                  <c:v>30.5</c:v>
+                </c:pt>
+                <c:pt idx="16">
+                  <c:v>38.3</c:v>
+                </c:pt>
+                <c:pt idx="17">
+                  <c:v>47.9</c:v>
+                </c:pt>
+                <c:pt idx="18">
+                  <c:v>50.2</c:v>
+                </c:pt>
+              </c:numCache>
+            </c:numRef>
+          </c:xVal>
+          <c:yVal>
+            <c:numRef>
+              <c:f>Sheet1!$I$2:$I$20</c:f>
+              <c:numCache>
+                <c:formatCode>General</c:formatCode>
+                <c:ptCount val="19"/>
+                <c:pt idx="0">
+                  <c:v/>
+                </c:pt>
+                <c:pt idx="1">
+                  <c:v/>
+                </c:pt>
+                <c:pt idx="2">
+                  <c:v/>
+                </c:pt>
+                <c:pt idx="3">
+                  <c:v/>
+                </c:pt>
+                <c:pt idx="4">
+                  <c:v/>
+                </c:pt>
+                <c:pt idx="5">
+                  <c:v/>
+                </c:pt>
+                <c:pt idx="6">
+                  <c:v/>
+                </c:pt>
+                <c:pt idx="7">
+                  <c:v>15.5</c:v>
+                </c:pt>
+                <c:pt idx="8">
+                  <c:v/>
+                </c:pt>
+                <c:pt idx="9">
+                  <c:v/>
+                </c:pt>
+                <c:pt idx="10">
+                  <c:v/>
+                </c:pt>
+                <c:pt idx="11">
+                  <c:v/>
+                </c:pt>
+                <c:pt idx="12">
+                  <c:v/>
+                </c:pt>
+                <c:pt idx="13">
+                  <c:v/>
+                </c:pt>
+                <c:pt idx="14">
+                  <c:v/>
+                </c:pt>
+                <c:pt idx="15">
+                  <c:v/>
+                </c:pt>
+                <c:pt idx="16">
+                  <c:v/>
+                </c:pt>
+                <c:pt idx="17">
+                  <c:v/>
+                </c:pt>
+                <c:pt idx="18">
+                  <c:v/>
+                </c:pt>
+              </c:numCache>
+            </c:numRef>
+          </c:yVal>
+          <c:smooth val="0"/>
+        </c:ser>
+        <c:ser>
+          <c:idx val="8"/>
+          <c:order val="8"/>
+          <c:tx>
+            <c:strRef>
+              <c:f>Sheet1!$J$1</c:f>
+              <c:strCache>
+                <c:ptCount val="1"/>
+                <c:pt idx="0">
+                  <c:v>제38145회 S&amp;P500·KOSPI200·Nikkei225</c:v>
+                </c:pt>
+              </c:strCache>
+            </c:strRef>
+          </c:tx>
+          <c:spPr>
+            <a:solidFill>
+              <a:srgbClr val="9AA6B2"/>
+            </a:solidFill>
+            <a:ln>
+              <a:noFill/>
+            </a:ln>
+            <a:effectLst/>
+          </c:spPr>
+          <c:marker>
+            <c:symbol val="circle"/>
+            <c:size val="9"/>
+            <c:spPr>
+              <a:solidFill>
+                <a:srgbClr val="9AA6B2"/>
+              </a:solidFill>
+              <a:ln w="9525" cap="flat">
+                <a:solidFill>
+                  <a:srgbClr val="9AA6B2"/>
+                </a:solidFill>
+                <a:prstDash val="solid"/>
+                <a:round/>
+              </a:ln>
+              <a:effectLst/>
+            </c:spPr>
+          </c:marker>
+          <c:xVal>
+            <c:numRef>
+              <c:f>Sheet1!$A$2:$A$20</c:f>
+              <c:numCache>
+                <c:formatCode>General</c:formatCode>
+                <c:ptCount val="19"/>
+                <c:pt idx="0">
+                  <c:v>9.5</c:v>
+                </c:pt>
+                <c:pt idx="1">
+                  <c:v>10</c:v>
+                </c:pt>
+                <c:pt idx="2">
+                  <c:v>11.1</c:v>
+                </c:pt>
+                <c:pt idx="3">
+                  <c:v>11.4</c:v>
+                </c:pt>
+                <c:pt idx="4">
+                  <c:v>12.3</c:v>
+                </c:pt>
+                <c:pt idx="5">
+                  <c:v>13.3</c:v>
+                </c:pt>
+                <c:pt idx="6">
+                  <c:v>13.8</c:v>
+                </c:pt>
+                <c:pt idx="7">
+                  <c:v>13.8</c:v>
+                </c:pt>
+                <c:pt idx="8">
+                  <c:v>15.2</c:v>
+                </c:pt>
+                <c:pt idx="9">
+                  <c:v>16.5</c:v>
+                </c:pt>
+                <c:pt idx="10">
+                  <c:v>19.2</c:v>
+                </c:pt>
+                <c:pt idx="11">
+                  <c:v>21.1</c:v>
+                </c:pt>
+                <c:pt idx="12">
+                  <c:v>21.9</c:v>
+                </c:pt>
+                <c:pt idx="13">
+                  <c:v>24.1</c:v>
+                </c:pt>
+                <c:pt idx="14">
+                  <c:v>24.3</c:v>
+                </c:pt>
+                <c:pt idx="15">
+                  <c:v>30.5</c:v>
+                </c:pt>
+                <c:pt idx="16">
+                  <c:v>38.3</c:v>
+                </c:pt>
+                <c:pt idx="17">
+                  <c:v>47.9</c:v>
+                </c:pt>
+                <c:pt idx="18">
+                  <c:v>50.2</c:v>
+                </c:pt>
+              </c:numCache>
+            </c:numRef>
+          </c:xVal>
+          <c:yVal>
+            <c:numRef>
+              <c:f>Sheet1!$J$2:$J$20</c:f>
+              <c:numCache>
+                <c:formatCode>General</c:formatCode>
+                <c:ptCount val="19"/>
+                <c:pt idx="0">
+                  <c:v/>
+                </c:pt>
+                <c:pt idx="1">
+                  <c:v/>
+                </c:pt>
+                <c:pt idx="2">
+                  <c:v/>
+                </c:pt>
+                <c:pt idx="3">
+                  <c:v/>
+                </c:pt>
+                <c:pt idx="4">
+                  <c:v/>
+                </c:pt>
+                <c:pt idx="5">
+                  <c:v/>
+                </c:pt>
+                <c:pt idx="6">
+                  <c:v/>
+                </c:pt>
+                <c:pt idx="7">
+                  <c:v/>
+                </c:pt>
+                <c:pt idx="8">
+                  <c:v>12.1</c:v>
+                </c:pt>
+                <c:pt idx="9">
+                  <c:v/>
+                </c:pt>
+                <c:pt idx="10">
+                  <c:v/>
+                </c:pt>
+                <c:pt idx="11">
+                  <c:v/>
+                </c:pt>
+                <c:pt idx="12">
+                  <c:v/>
+                </c:pt>
+                <c:pt idx="13">
+                  <c:v/>
+                </c:pt>
+                <c:pt idx="14">
+                  <c:v/>
+                </c:pt>
+                <c:pt idx="15">
+                  <c:v/>
+                </c:pt>
+                <c:pt idx="16">
+                  <c:v/>
+                </c:pt>
+                <c:pt idx="17">
+                  <c:v/>
+                </c:pt>
+                <c:pt idx="18">
+                  <c:v/>
+                </c:pt>
+              </c:numCache>
+            </c:numRef>
+          </c:yVal>
+          <c:smooth val="0"/>
+        </c:ser>
+        <c:ser>
+          <c:idx val="9"/>
+          <c:order val="9"/>
+          <c:tx>
+            <c:strRef>
+              <c:f>Sheet1!$K$1</c:f>
+              <c:strCache>
+                <c:ptCount val="1"/>
+                <c:pt idx="0">
+                  <c:v>제38142회 삼성전자·SK하이닉스</c:v>
+                </c:pt>
+              </c:strCache>
+            </c:strRef>
+          </c:tx>
+          <c:spPr>
+            <a:solidFill>
+              <a:srgbClr val="9AA6B2"/>
+            </a:solidFill>
+            <a:ln>
+              <a:noFill/>
+            </a:ln>
+            <a:effectLst/>
+          </c:spPr>
+          <c:marker>
+            <c:symbol val="circle"/>
+            <c:size val="9"/>
+            <c:spPr>
+              <a:solidFill>
+                <a:srgbClr val="9AA6B2"/>
+              </a:solidFill>
+              <a:ln w="9525" cap="flat">
+                <a:solidFill>
+                  <a:srgbClr val="9AA6B2"/>
+                </a:solidFill>
+                <a:prstDash val="solid"/>
+                <a:round/>
+              </a:ln>
+              <a:effectLst/>
+            </c:spPr>
+          </c:marker>
+          <c:xVal>
+            <c:numRef>
+              <c:f>Sheet1!$A$2:$A$20</c:f>
+              <c:numCache>
+                <c:formatCode>General</c:formatCode>
+                <c:ptCount val="19"/>
+                <c:pt idx="0">
+                  <c:v>9.5</c:v>
+                </c:pt>
+                <c:pt idx="1">
+                  <c:v>10</c:v>
+                </c:pt>
+                <c:pt idx="2">
+                  <c:v>11.1</c:v>
+                </c:pt>
+                <c:pt idx="3">
+                  <c:v>11.4</c:v>
+                </c:pt>
+                <c:pt idx="4">
+                  <c:v>12.3</c:v>
+                </c:pt>
+                <c:pt idx="5">
+                  <c:v>13.3</c:v>
+                </c:pt>
+                <c:pt idx="6">
+                  <c:v>13.8</c:v>
+                </c:pt>
+                <c:pt idx="7">
+                  <c:v>13.8</c:v>
+                </c:pt>
+                <c:pt idx="8">
+                  <c:v>15.2</c:v>
+                </c:pt>
+                <c:pt idx="9">
+                  <c:v>16.5</c:v>
+                </c:pt>
+                <c:pt idx="10">
+                  <c:v>19.2</c:v>
+                </c:pt>
+                <c:pt idx="11">
+                  <c:v>21.1</c:v>
+                </c:pt>
+                <c:pt idx="12">
+                  <c:v>21.9</c:v>
+                </c:pt>
+                <c:pt idx="13">
+                  <c:v>24.1</c:v>
+                </c:pt>
+                <c:pt idx="14">
+                  <c:v>24.3</c:v>
+                </c:pt>
+                <c:pt idx="15">
+                  <c:v>30.5</c:v>
+                </c:pt>
+                <c:pt idx="16">
+                  <c:v>38.3</c:v>
+                </c:pt>
+                <c:pt idx="17">
+                  <c:v>47.9</c:v>
+                </c:pt>
+                <c:pt idx="18">
+                  <c:v>50.2</c:v>
+                </c:pt>
+              </c:numCache>
+            </c:numRef>
+          </c:xVal>
+          <c:yVal>
+            <c:numRef>
+              <c:f>Sheet1!$K$2:$K$20</c:f>
+              <c:numCache>
+                <c:formatCode>General</c:formatCode>
+                <c:ptCount val="19"/>
+                <c:pt idx="0">
+                  <c:v/>
+                </c:pt>
+                <c:pt idx="1">
+                  <c:v/>
+                </c:pt>
+                <c:pt idx="2">
+                  <c:v/>
+                </c:pt>
+                <c:pt idx="3">
+                  <c:v/>
+                </c:pt>
+                <c:pt idx="4">
+                  <c:v/>
+                </c:pt>
+                <c:pt idx="5">
+                  <c:v/>
+                </c:pt>
+                <c:pt idx="6">
+                  <c:v/>
+                </c:pt>
+                <c:pt idx="7">
+                  <c:v/>
+                </c:pt>
+                <c:pt idx="8">
+                  <c:v/>
+                </c:pt>
+                <c:pt idx="9">
+                  <c:v>18.4</c:v>
+                </c:pt>
+                <c:pt idx="10">
+                  <c:v/>
+                </c:pt>
+                <c:pt idx="11">
+                  <c:v/>
+                </c:pt>
+                <c:pt idx="12">
+                  <c:v/>
+                </c:pt>
+                <c:pt idx="13">
+                  <c:v/>
+                </c:pt>
+                <c:pt idx="14">
+                  <c:v/>
+                </c:pt>
+                <c:pt idx="15">
+                  <c:v/>
+                </c:pt>
+                <c:pt idx="16">
+                  <c:v/>
+                </c:pt>
+                <c:pt idx="17">
+                  <c:v/>
+                </c:pt>
+                <c:pt idx="18">
+                  <c:v/>
+                </c:pt>
+              </c:numCache>
+            </c:numRef>
+          </c:yVal>
+          <c:smooth val="0"/>
+        </c:ser>
+        <c:ser>
+          <c:idx val="10"/>
+          <c:order val="10"/>
+          <c:tx>
+            <c:strRef>
+              <c:f>Sheet1!$L$1</c:f>
+              <c:strCache>
+                <c:ptCount val="1"/>
+                <c:pt idx="0">
+                  <c:v>제38144회 S&amp;P500·HSCEI·Nikkei225</c:v>
+                </c:pt>
+              </c:strCache>
+            </c:strRef>
+          </c:tx>
+          <c:spPr>
+            <a:solidFill>
+              <a:srgbClr val="9AA6B2"/>
+            </a:solidFill>
+            <a:ln>
+              <a:noFill/>
+            </a:ln>
+            <a:effectLst/>
+          </c:spPr>
+          <c:marker>
+            <c:symbol val="circle"/>
+            <c:size val="9"/>
+            <c:spPr>
+              <a:solidFill>
+                <a:srgbClr val="9AA6B2"/>
+              </a:solidFill>
+              <a:ln w="9525" cap="flat">
+                <a:solidFill>
+                  <a:srgbClr val="9AA6B2"/>
+                </a:solidFill>
+                <a:prstDash val="solid"/>
+                <a:round/>
+              </a:ln>
+              <a:effectLst/>
+            </c:spPr>
+          </c:marker>
+          <c:xVal>
+            <c:numRef>
+              <c:f>Sheet1!$A$2:$A$20</c:f>
+              <c:numCache>
+                <c:formatCode>General</c:formatCode>
+                <c:ptCount val="19"/>
+                <c:pt idx="0">
+                  <c:v>9.5</c:v>
+                </c:pt>
+                <c:pt idx="1">
+                  <c:v>10</c:v>
+                </c:pt>
+                <c:pt idx="2">
+                  <c:v>11.1</c:v>
+                </c:pt>
+                <c:pt idx="3">
+                  <c:v>11.4</c:v>
+                </c:pt>
+                <c:pt idx="4">
+                  <c:v>12.3</c:v>
+                </c:pt>
+                <c:pt idx="5">
+                  <c:v>13.3</c:v>
+                </c:pt>
+                <c:pt idx="6">
+                  <c:v>13.8</c:v>
+                </c:pt>
+                <c:pt idx="7">
+                  <c:v>13.8</c:v>
+                </c:pt>
+                <c:pt idx="8">
+                  <c:v>15.2</c:v>
+                </c:pt>
+                <c:pt idx="9">
+                  <c:v>16.5</c:v>
+                </c:pt>
+                <c:pt idx="10">
+                  <c:v>19.2</c:v>
+                </c:pt>
+                <c:pt idx="11">
+                  <c:v>21.1</c:v>
+                </c:pt>
+                <c:pt idx="12">
+                  <c:v>21.9</c:v>
+                </c:pt>
+                <c:pt idx="13">
+                  <c:v>24.1</c:v>
+                </c:pt>
+                <c:pt idx="14">
+                  <c:v>24.3</c:v>
+                </c:pt>
+                <c:pt idx="15">
+                  <c:v>30.5</c:v>
+                </c:pt>
+                <c:pt idx="16">
+                  <c:v>38.3</c:v>
+                </c:pt>
+                <c:pt idx="17">
+                  <c:v>47.9</c:v>
+                </c:pt>
+                <c:pt idx="18">
+                  <c:v>50.2</c:v>
+                </c:pt>
+              </c:numCache>
+            </c:numRef>
+          </c:xVal>
+          <c:yVal>
+            <c:numRef>
+              <c:f>Sheet1!$L$2:$L$20</c:f>
+              <c:numCache>
+                <c:formatCode>General</c:formatCode>
+                <c:ptCount val="19"/>
+                <c:pt idx="0">
+                  <c:v/>
+                </c:pt>
+                <c:pt idx="1">
+                  <c:v/>
+                </c:pt>
+                <c:pt idx="2">
+                  <c:v/>
+                </c:pt>
+                <c:pt idx="3">
+                  <c:v/>
+                </c:pt>
+                <c:pt idx="4">
+                  <c:v/>
+                </c:pt>
+                <c:pt idx="5">
+                  <c:v/>
+                </c:pt>
+                <c:pt idx="6">
+                  <c:v/>
+                </c:pt>
+                <c:pt idx="7">
+                  <c:v/>
+                </c:pt>
+                <c:pt idx="8">
+                  <c:v/>
+                </c:pt>
+                <c:pt idx="9">
+                  <c:v/>
+                </c:pt>
+                <c:pt idx="10">
+                  <c:v>10</c:v>
+                </c:pt>
+                <c:pt idx="11">
+                  <c:v/>
+                </c:pt>
+                <c:pt idx="12">
+                  <c:v/>
+                </c:pt>
+                <c:pt idx="13">
+                  <c:v/>
+                </c:pt>
+                <c:pt idx="14">
+                  <c:v/>
+                </c:pt>
+                <c:pt idx="15">
+                  <c:v/>
+                </c:pt>
+                <c:pt idx="16">
+                  <c:v/>
+                </c:pt>
+                <c:pt idx="17">
+                  <c:v/>
+                </c:pt>
+                <c:pt idx="18">
+                  <c:v/>
+                </c:pt>
+              </c:numCache>
+            </c:numRef>
+          </c:yVal>
+          <c:smooth val="0"/>
+        </c:ser>
+        <c:ser>
+          <c:idx val="11"/>
+          <c:order val="11"/>
+          <c:tx>
+            <c:strRef>
+              <c:f>Sheet1!$M$1</c:f>
+              <c:strCache>
+                <c:ptCount val="1"/>
+                <c:pt idx="0">
+                  <c:v>제38138회 S&amp;P500·KOSPI200·Nikkei225</c:v>
+                </c:pt>
+              </c:strCache>
+            </c:strRef>
+          </c:tx>
+          <c:spPr>
+            <a:solidFill>
+              <a:srgbClr val="9AA6B2"/>
+            </a:solidFill>
+            <a:ln>
+              <a:noFill/>
+            </a:ln>
+            <a:effectLst/>
+          </c:spPr>
+          <c:marker>
+            <c:symbol val="circle"/>
+            <c:size val="9"/>
+            <c:spPr>
+              <a:solidFill>
+                <a:srgbClr val="9AA6B2"/>
+              </a:solidFill>
+              <a:ln w="9525" cap="flat">
+                <a:solidFill>
+                  <a:srgbClr val="9AA6B2"/>
+                </a:solidFill>
+                <a:prstDash val="solid"/>
+                <a:round/>
+              </a:ln>
+              <a:effectLst/>
+            </c:spPr>
+          </c:marker>
+          <c:xVal>
+            <c:numRef>
+              <c:f>Sheet1!$A$2:$A$20</c:f>
+              <c:numCache>
+                <c:formatCode>General</c:formatCode>
+                <c:ptCount val="19"/>
+                <c:pt idx="0">
+                  <c:v>9.5</c:v>
+                </c:pt>
+                <c:pt idx="1">
+                  <c:v>10</c:v>
+                </c:pt>
+                <c:pt idx="2">
+                  <c:v>11.1</c:v>
+                </c:pt>
+                <c:pt idx="3">
+                  <c:v>11.4</c:v>
+                </c:pt>
+                <c:pt idx="4">
+                  <c:v>12.3</c:v>
+                </c:pt>
+                <c:pt idx="5">
+                  <c:v>13.3</c:v>
+                </c:pt>
+                <c:pt idx="6">
+                  <c:v>13.8</c:v>
+                </c:pt>
+                <c:pt idx="7">
+                  <c:v>13.8</c:v>
+                </c:pt>
+                <c:pt idx="8">
+                  <c:v>15.2</c:v>
+                </c:pt>
+                <c:pt idx="9">
+                  <c:v>16.5</c:v>
+                </c:pt>
+                <c:pt idx="10">
+                  <c:v>19.2</c:v>
+                </c:pt>
+                <c:pt idx="11">
+                  <c:v>21.1</c:v>
+                </c:pt>
+                <c:pt idx="12">
+                  <c:v>21.9</c:v>
+                </c:pt>
+                <c:pt idx="13">
+                  <c:v>24.1</c:v>
+                </c:pt>
+                <c:pt idx="14">
+                  <c:v>24.3</c:v>
+                </c:pt>
+                <c:pt idx="15">
+                  <c:v>30.5</c:v>
+                </c:pt>
+                <c:pt idx="16">
+                  <c:v>38.3</c:v>
+                </c:pt>
+                <c:pt idx="17">
+                  <c:v>47.9</c:v>
+                </c:pt>
+                <c:pt idx="18">
+                  <c:v>50.2</c:v>
+                </c:pt>
+              </c:numCache>
+            </c:numRef>
+          </c:xVal>
+          <c:yVal>
+            <c:numRef>
+              <c:f>Sheet1!$M$2:$M$20</c:f>
+              <c:numCache>
+                <c:formatCode>General</c:formatCode>
+                <c:ptCount val="19"/>
+                <c:pt idx="0">
+                  <c:v/>
+                </c:pt>
+                <c:pt idx="1">
+                  <c:v/>
+                </c:pt>
+                <c:pt idx="2">
+                  <c:v/>
+                </c:pt>
+                <c:pt idx="3">
+                  <c:v/>
+                </c:pt>
+                <c:pt idx="4">
+                  <c:v/>
+                </c:pt>
+                <c:pt idx="5">
+                  <c:v/>
+                </c:pt>
+                <c:pt idx="6">
+                  <c:v/>
+                </c:pt>
+                <c:pt idx="7">
+                  <c:v/>
+                </c:pt>
+                <c:pt idx="8">
+                  <c:v/>
+                </c:pt>
+                <c:pt idx="9">
+                  <c:v/>
+                </c:pt>
+                <c:pt idx="10">
+                  <c:v/>
+                </c:pt>
+                <c:pt idx="11">
+                  <c:v>12</c:v>
+                </c:pt>
+                <c:pt idx="12">
+                  <c:v/>
+                </c:pt>
+                <c:pt idx="13">
+                  <c:v/>
+                </c:pt>
+                <c:pt idx="14">
+                  <c:v/>
+                </c:pt>
+                <c:pt idx="15">
+                  <c:v/>
+                </c:pt>
+                <c:pt idx="16">
+                  <c:v/>
+                </c:pt>
+                <c:pt idx="17">
+                  <c:v/>
+                </c:pt>
+                <c:pt idx="18">
+                  <c:v/>
+                </c:pt>
+              </c:numCache>
+            </c:numRef>
+          </c:yVal>
+          <c:smooth val="0"/>
+        </c:ser>
+        <c:ser>
+          <c:idx val="12"/>
+          <c:order val="12"/>
+          <c:tx>
+            <c:strRef>
+              <c:f>Sheet1!$N$1</c:f>
+              <c:strCache>
+                <c:ptCount val="1"/>
+                <c:pt idx="0">
+                  <c:v>제38147회 삼성전자·SK하이닉스</c:v>
+                </c:pt>
+              </c:strCache>
+            </c:strRef>
+          </c:tx>
+          <c:spPr>
+            <a:solidFill>
+              <a:srgbClr val="9AA6B2"/>
+            </a:solidFill>
+            <a:ln>
+              <a:noFill/>
+            </a:ln>
+            <a:effectLst/>
+          </c:spPr>
+          <c:marker>
+            <c:symbol val="circle"/>
+            <c:size val="9"/>
+            <c:spPr>
+              <a:solidFill>
+                <a:srgbClr val="9AA6B2"/>
+              </a:solidFill>
+              <a:ln w="9525" cap="flat">
+                <a:solidFill>
+                  <a:srgbClr val="9AA6B2"/>
+                </a:solidFill>
+                <a:prstDash val="solid"/>
+                <a:round/>
+              </a:ln>
+              <a:effectLst/>
+            </c:spPr>
+          </c:marker>
+          <c:xVal>
+            <c:numRef>
+              <c:f>Sheet1!$A$2:$A$20</c:f>
+              <c:numCache>
+                <c:formatCode>General</c:formatCode>
+                <c:ptCount val="19"/>
+                <c:pt idx="0">
+                  <c:v>9.5</c:v>
+                </c:pt>
+                <c:pt idx="1">
+                  <c:v>10</c:v>
+                </c:pt>
+                <c:pt idx="2">
+                  <c:v>11.1</c:v>
+                </c:pt>
+                <c:pt idx="3">
+                  <c:v>11.4</c:v>
+                </c:pt>
+                <c:pt idx="4">
+                  <c:v>12.3</c:v>
+                </c:pt>
+                <c:pt idx="5">
+                  <c:v>13.3</c:v>
+                </c:pt>
+                <c:pt idx="6">
+                  <c:v>13.8</c:v>
+                </c:pt>
+                <c:pt idx="7">
+                  <c:v>13.8</c:v>
+                </c:pt>
+                <c:pt idx="8">
+                  <c:v>15.2</c:v>
+                </c:pt>
+                <c:pt idx="9">
+                  <c:v>16.5</c:v>
+                </c:pt>
+                <c:pt idx="10">
+                  <c:v>19.2</c:v>
+                </c:pt>
+                <c:pt idx="11">
+                  <c:v>21.1</c:v>
+                </c:pt>
+                <c:pt idx="12">
+                  <c:v>21.9</c:v>
+                </c:pt>
+                <c:pt idx="13">
+                  <c:v>24.1</c:v>
+                </c:pt>
+                <c:pt idx="14">
+                  <c:v>24.3</c:v>
+                </c:pt>
+                <c:pt idx="15">
+                  <c:v>30.5</c:v>
+                </c:pt>
+                <c:pt idx="16">
+                  <c:v>38.3</c:v>
+                </c:pt>
+                <c:pt idx="17">
+                  <c:v>47.9</c:v>
+                </c:pt>
+                <c:pt idx="18">
+                  <c:v>50.2</c:v>
+                </c:pt>
+              </c:numCache>
+            </c:numRef>
+          </c:xVal>
+          <c:yVal>
+            <c:numRef>
+              <c:f>Sheet1!$N$2:$N$20</c:f>
+              <c:numCache>
+                <c:formatCode>General</c:formatCode>
+                <c:ptCount val="19"/>
+                <c:pt idx="0">
+                  <c:v/>
+                </c:pt>
+                <c:pt idx="1">
+                  <c:v/>
+                </c:pt>
+                <c:pt idx="2">
+                  <c:v/>
+                </c:pt>
+                <c:pt idx="3">
+                  <c:v/>
+                </c:pt>
+                <c:pt idx="4">
+                  <c:v/>
+                </c:pt>
+                <c:pt idx="5">
+                  <c:v/>
+                </c:pt>
+                <c:pt idx="6">
+                  <c:v/>
+                </c:pt>
+                <c:pt idx="7">
+                  <c:v/>
+                </c:pt>
+                <c:pt idx="8">
+                  <c:v/>
+                </c:pt>
+                <c:pt idx="9">
+                  <c:v/>
+                </c:pt>
+                <c:pt idx="10">
+                  <c:v/>
+                </c:pt>
+                <c:pt idx="11">
+                  <c:v/>
+                </c:pt>
+                <c:pt idx="12">
+                  <c:v>21.5</c:v>
+                </c:pt>
+                <c:pt idx="13">
+                  <c:v/>
+                </c:pt>
+                <c:pt idx="14">
+                  <c:v/>
+                </c:pt>
+                <c:pt idx="15">
+                  <c:v/>
+                </c:pt>
+                <c:pt idx="16">
+                  <c:v/>
+                </c:pt>
+                <c:pt idx="17">
+                  <c:v/>
+                </c:pt>
+                <c:pt idx="18">
+                  <c:v/>
+                </c:pt>
+              </c:numCache>
+            </c:numRef>
+          </c:yVal>
+          <c:smooth val="0"/>
+        </c:ser>
+        <c:ser>
+          <c:idx val="13"/>
+          <c:order val="13"/>
+          <c:tx>
+            <c:strRef>
+              <c:f>Sheet1!$O$1</c:f>
+              <c:strCache>
+                <c:ptCount val="1"/>
+                <c:pt idx="0">
+                  <c:v>제38146회 EuroStoxx50·KOSPI200·Nikkei225</c:v>
+                </c:pt>
+              </c:strCache>
+            </c:strRef>
+          </c:tx>
+          <c:spPr>
+            <a:solidFill>
+              <a:srgbClr val="9AA6B2"/>
+            </a:solidFill>
+            <a:ln>
+              <a:noFill/>
+            </a:ln>
+            <a:effectLst/>
+          </c:spPr>
+          <c:marker>
+            <c:symbol val="circle"/>
+            <c:size val="9"/>
+            <c:spPr>
+              <a:solidFill>
+                <a:srgbClr val="9AA6B2"/>
+              </a:solidFill>
+              <a:ln w="9525" cap="flat">
+                <a:solidFill>
+                  <a:srgbClr val="9AA6B2"/>
+                </a:solidFill>
+                <a:prstDash val="solid"/>
+                <a:round/>
+              </a:ln>
+              <a:effectLst/>
+            </c:spPr>
+          </c:marker>
+          <c:xVal>
+            <c:numRef>
+              <c:f>Sheet1!$A$2:$A$20</c:f>
+              <c:numCache>
+                <c:formatCode>General</c:formatCode>
+                <c:ptCount val="19"/>
+                <c:pt idx="0">
+                  <c:v>9.5</c:v>
+                </c:pt>
+                <c:pt idx="1">
+                  <c:v>10</c:v>
+                </c:pt>
+                <c:pt idx="2">
+                  <c:v>11.1</c:v>
+                </c:pt>
+                <c:pt idx="3">
+                  <c:v>11.4</c:v>
+                </c:pt>
+                <c:pt idx="4">
+                  <c:v>12.3</c:v>
+                </c:pt>
+                <c:pt idx="5">
+                  <c:v>13.3</c:v>
+                </c:pt>
+                <c:pt idx="6">
+                  <c:v>13.8</c:v>
+                </c:pt>
+                <c:pt idx="7">
+                  <c:v>13.8</c:v>
+                </c:pt>
+                <c:pt idx="8">
+                  <c:v>15.2</c:v>
+                </c:pt>
+                <c:pt idx="9">
+                  <c:v>16.5</c:v>
+                </c:pt>
+                <c:pt idx="10">
+                  <c:v>19.2</c:v>
+                </c:pt>
+                <c:pt idx="11">
+                  <c:v>21.1</c:v>
+                </c:pt>
+                <c:pt idx="12">
+                  <c:v>21.9</c:v>
+                </c:pt>
+                <c:pt idx="13">
+                  <c:v>24.1</c:v>
+                </c:pt>
+                <c:pt idx="14">
+                  <c:v>24.3</c:v>
+                </c:pt>
+                <c:pt idx="15">
+                  <c:v>30.5</c:v>
+                </c:pt>
+                <c:pt idx="16">
+                  <c:v>38.3</c:v>
+                </c:pt>
+                <c:pt idx="17">
+                  <c:v>47.9</c:v>
+                </c:pt>
+                <c:pt idx="18">
+                  <c:v>50.2</c:v>
+                </c:pt>
+              </c:numCache>
+            </c:numRef>
+          </c:xVal>
+          <c:yVal>
+            <c:numRef>
+              <c:f>Sheet1!$O$2:$O$20</c:f>
+              <c:numCache>
+                <c:formatCode>General</c:formatCode>
+                <c:ptCount val="19"/>
+                <c:pt idx="0">
+                  <c:v/>
+                </c:pt>
+                <c:pt idx="1">
+                  <c:v/>
+                </c:pt>
+                <c:pt idx="2">
+                  <c:v/>
+                </c:pt>
+                <c:pt idx="3">
+                  <c:v/>
+                </c:pt>
+                <c:pt idx="4">
+                  <c:v/>
+                </c:pt>
+                <c:pt idx="5">
+                  <c:v/>
+                </c:pt>
+                <c:pt idx="6">
+                  <c:v/>
+                </c:pt>
+                <c:pt idx="7">
+                  <c:v/>
+                </c:pt>
+                <c:pt idx="8">
+                  <c:v/>
+                </c:pt>
+                <c:pt idx="9">
+                  <c:v/>
+                </c:pt>
+                <c:pt idx="10">
+                  <c:v/>
+                </c:pt>
+                <c:pt idx="11">
+                  <c:v/>
+                </c:pt>
+                <c:pt idx="12">
+                  <c:v/>
+                </c:pt>
+                <c:pt idx="13">
+                  <c:v>14.7</c:v>
+                </c:pt>
+                <c:pt idx="14">
+                  <c:v/>
+                </c:pt>
+                <c:pt idx="15">
+                  <c:v/>
+                </c:pt>
+                <c:pt idx="16">
+                  <c:v/>
+                </c:pt>
+                <c:pt idx="17">
+                  <c:v/>
+                </c:pt>
+                <c:pt idx="18">
+                  <c:v/>
+                </c:pt>
+              </c:numCache>
+            </c:numRef>
+          </c:yVal>
+          <c:smooth val="0"/>
+        </c:ser>
+        <c:ser>
+          <c:idx val="14"/>
+          <c:order val="14"/>
+          <c:tx>
+            <c:strRef>
+              <c:f>Sheet1!$P$1</c:f>
+              <c:strCache>
+                <c:ptCount val="1"/>
+                <c:pt idx="0">
+                  <c:v>제38143회 삼성전자·SK하이닉스</c:v>
+                </c:pt>
+              </c:strCache>
+            </c:strRef>
+          </c:tx>
+          <c:spPr>
+            <a:solidFill>
+              <a:srgbClr val="F58220"/>
+            </a:solidFill>
+            <a:ln>
+              <a:noFill/>
+            </a:ln>
+            <a:effectLst/>
+          </c:spPr>
+          <c:marker>
+            <c:symbol val="circle"/>
+            <c:size val="9"/>
+            <c:spPr>
+              <a:solidFill>
+                <a:srgbClr val="F58220"/>
+              </a:solidFill>
+              <a:ln w="9525" cap="flat">
+                <a:solidFill>
+                  <a:srgbClr val="F58220"/>
+                </a:solidFill>
+                <a:prstDash val="solid"/>
+                <a:round/>
+              </a:ln>
+              <a:effectLst/>
+            </c:spPr>
+          </c:marker>
+          <c:xVal>
+            <c:numRef>
+              <c:f>Sheet1!$A$2:$A$20</c:f>
+              <c:numCache>
+                <c:formatCode>General</c:formatCode>
+                <c:ptCount val="19"/>
+                <c:pt idx="0">
+                  <c:v>9.5</c:v>
+                </c:pt>
+                <c:pt idx="1">
+                  <c:v>10</c:v>
+                </c:pt>
+                <c:pt idx="2">
+                  <c:v>11.1</c:v>
+                </c:pt>
+                <c:pt idx="3">
+                  <c:v>11.4</c:v>
+                </c:pt>
+                <c:pt idx="4">
+                  <c:v>12.3</c:v>
+                </c:pt>
+                <c:pt idx="5">
+                  <c:v>13.3</c:v>
+                </c:pt>
+                <c:pt idx="6">
+                  <c:v>13.8</c:v>
+                </c:pt>
+                <c:pt idx="7">
+                  <c:v>13.8</c:v>
+                </c:pt>
+                <c:pt idx="8">
+                  <c:v>15.2</c:v>
+                </c:pt>
+                <c:pt idx="9">
+                  <c:v>16.5</c:v>
+                </c:pt>
+                <c:pt idx="10">
+                  <c:v>19.2</c:v>
+                </c:pt>
+                <c:pt idx="11">
+                  <c:v>21.1</c:v>
+                </c:pt>
+                <c:pt idx="12">
+                  <c:v>21.9</c:v>
+                </c:pt>
+                <c:pt idx="13">
+                  <c:v>24.1</c:v>
+                </c:pt>
+                <c:pt idx="14">
+                  <c:v>24.3</c:v>
+                </c:pt>
+                <c:pt idx="15">
+                  <c:v>30.5</c:v>
+                </c:pt>
+                <c:pt idx="16">
+                  <c:v>38.3</c:v>
+                </c:pt>
+                <c:pt idx="17">
+                  <c:v>47.9</c:v>
+                </c:pt>
+                <c:pt idx="18">
+                  <c:v>50.2</c:v>
+                </c:pt>
+              </c:numCache>
+            </c:numRef>
+          </c:xVal>
+          <c:yVal>
+            <c:numRef>
+              <c:f>Sheet1!$P$2:$P$20</c:f>
+              <c:numCache>
+                <c:formatCode>General</c:formatCode>
+                <c:ptCount val="19"/>
+                <c:pt idx="0">
+                  <c:v/>
+                </c:pt>
+                <c:pt idx="1">
+                  <c:v/>
+                </c:pt>
+                <c:pt idx="2">
+                  <c:v/>
+                </c:pt>
+                <c:pt idx="3">
+                  <c:v/>
+                </c:pt>
+                <c:pt idx="4">
+                  <c:v/>
+                </c:pt>
+                <c:pt idx="5">
+                  <c:v/>
+                </c:pt>
+                <c:pt idx="6">
+                  <c:v/>
+                </c:pt>
+                <c:pt idx="7">
+                  <c:v/>
+                </c:pt>
+                <c:pt idx="8">
+                  <c:v/>
+                </c:pt>
+                <c:pt idx="9">
+                  <c:v/>
+                </c:pt>
+                <c:pt idx="10">
+                  <c:v/>
+                </c:pt>
+                <c:pt idx="11">
+                  <c:v/>
+                </c:pt>
+                <c:pt idx="12">
+                  <c:v/>
+                </c:pt>
+                <c:pt idx="13">
+                  <c:v/>
+                </c:pt>
+                <c:pt idx="14">
+                  <c:v>25</c:v>
+                </c:pt>
+                <c:pt idx="15">
+                  <c:v/>
+                </c:pt>
+                <c:pt idx="16">
+                  <c:v/>
+                </c:pt>
+                <c:pt idx="17">
+                  <c:v/>
+                </c:pt>
+                <c:pt idx="18">
+                  <c:v/>
+                </c:pt>
+              </c:numCache>
+            </c:numRef>
+          </c:yVal>
+          <c:smooth val="0"/>
+        </c:ser>
+        <c:ser>
+          <c:idx val="15"/>
+          <c:order val="15"/>
+          <c:tx>
+            <c:strRef>
+              <c:f>Sheet1!$Q$1</c:f>
+              <c:strCache>
+                <c:ptCount val="1"/>
+                <c:pt idx="0">
+                  <c:v>제38148회 테슬라·팔란티어 테크</c:v>
                 </c:pt>
               </c:strCache>
             </c:strRef>
@@ -581,7 +2843,7 @@
           </c:xVal>
           <c:yVal>
             <c:numRef>
-              <c:f>Sheet1!$D$2:$D$20</c:f>
+              <c:f>Sheet1!$Q$2:$Q$20</c:f>
               <c:numCache>
                 <c:formatCode>General</c:formatCode>
                 <c:ptCount val="19"/>
@@ -634,10 +2896,532 @@
                   <c:v>17</c:v>
                 </c:pt>
                 <c:pt idx="16">
+                  <c:v/>
+                </c:pt>
+                <c:pt idx="17">
+                  <c:v/>
+                </c:pt>
+                <c:pt idx="18">
+                  <c:v/>
+                </c:pt>
+              </c:numCache>
+            </c:numRef>
+          </c:yVal>
+          <c:smooth val="0"/>
+        </c:ser>
+        <c:ser>
+          <c:idx val="16"/>
+          <c:order val="16"/>
+          <c:tx>
+            <c:strRef>
+              <c:f>Sheet1!$R$1</c:f>
+              <c:strCache>
+                <c:ptCount val="1"/>
+                <c:pt idx="0">
+                  <c:v>제38149회 마이크론 테크놀로지·어플라이드 머티어리얼즈</c:v>
+                </c:pt>
+              </c:strCache>
+            </c:strRef>
+          </c:tx>
+          <c:spPr>
+            <a:solidFill>
+              <a:srgbClr val="C62828"/>
+            </a:solidFill>
+            <a:ln>
+              <a:noFill/>
+            </a:ln>
+            <a:effectLst/>
+          </c:spPr>
+          <c:marker>
+            <c:symbol val="circle"/>
+            <c:size val="9"/>
+            <c:spPr>
+              <a:solidFill>
+                <a:srgbClr val="C62828"/>
+              </a:solidFill>
+              <a:ln w="9525" cap="flat">
+                <a:solidFill>
+                  <a:srgbClr val="C62828"/>
+                </a:solidFill>
+                <a:prstDash val="solid"/>
+                <a:round/>
+              </a:ln>
+              <a:effectLst/>
+            </c:spPr>
+          </c:marker>
+          <c:xVal>
+            <c:numRef>
+              <c:f>Sheet1!$A$2:$A$20</c:f>
+              <c:numCache>
+                <c:formatCode>General</c:formatCode>
+                <c:ptCount val="19"/>
+                <c:pt idx="0">
+                  <c:v>9.5</c:v>
+                </c:pt>
+                <c:pt idx="1">
+                  <c:v>10</c:v>
+                </c:pt>
+                <c:pt idx="2">
+                  <c:v>11.1</c:v>
+                </c:pt>
+                <c:pt idx="3">
+                  <c:v>11.4</c:v>
+                </c:pt>
+                <c:pt idx="4">
+                  <c:v>12.3</c:v>
+                </c:pt>
+                <c:pt idx="5">
+                  <c:v>13.3</c:v>
+                </c:pt>
+                <c:pt idx="6">
+                  <c:v>13.8</c:v>
+                </c:pt>
+                <c:pt idx="7">
+                  <c:v>13.8</c:v>
+                </c:pt>
+                <c:pt idx="8">
+                  <c:v>15.2</c:v>
+                </c:pt>
+                <c:pt idx="9">
+                  <c:v>16.5</c:v>
+                </c:pt>
+                <c:pt idx="10">
+                  <c:v>19.2</c:v>
+                </c:pt>
+                <c:pt idx="11">
+                  <c:v>21.1</c:v>
+                </c:pt>
+                <c:pt idx="12">
+                  <c:v>21.9</c:v>
+                </c:pt>
+                <c:pt idx="13">
+                  <c:v>24.1</c:v>
+                </c:pt>
+                <c:pt idx="14">
+                  <c:v>24.3</c:v>
+                </c:pt>
+                <c:pt idx="15">
+                  <c:v>30.5</c:v>
+                </c:pt>
+                <c:pt idx="16">
+                  <c:v>38.3</c:v>
+                </c:pt>
+                <c:pt idx="17">
+                  <c:v>47.9</c:v>
+                </c:pt>
+                <c:pt idx="18">
+                  <c:v>50.2</c:v>
+                </c:pt>
+              </c:numCache>
+            </c:numRef>
+          </c:xVal>
+          <c:yVal>
+            <c:numRef>
+              <c:f>Sheet1!$R$2:$R$20</c:f>
+              <c:numCache>
+                <c:formatCode>General</c:formatCode>
+                <c:ptCount val="19"/>
+                <c:pt idx="0">
+                  <c:v/>
+                </c:pt>
+                <c:pt idx="1">
+                  <c:v/>
+                </c:pt>
+                <c:pt idx="2">
+                  <c:v/>
+                </c:pt>
+                <c:pt idx="3">
+                  <c:v/>
+                </c:pt>
+                <c:pt idx="4">
+                  <c:v/>
+                </c:pt>
+                <c:pt idx="5">
+                  <c:v/>
+                </c:pt>
+                <c:pt idx="6">
+                  <c:v/>
+                </c:pt>
+                <c:pt idx="7">
+                  <c:v/>
+                </c:pt>
+                <c:pt idx="8">
+                  <c:v/>
+                </c:pt>
+                <c:pt idx="9">
+                  <c:v/>
+                </c:pt>
+                <c:pt idx="10">
+                  <c:v/>
+                </c:pt>
+                <c:pt idx="11">
+                  <c:v/>
+                </c:pt>
+                <c:pt idx="12">
+                  <c:v/>
+                </c:pt>
+                <c:pt idx="13">
+                  <c:v/>
+                </c:pt>
+                <c:pt idx="14">
+                  <c:v/>
+                </c:pt>
+                <c:pt idx="15">
+                  <c:v/>
+                </c:pt>
+                <c:pt idx="16">
                   <c:v>21.3</c:v>
+                </c:pt>
+                <c:pt idx="17">
+                  <c:v/>
+                </c:pt>
+                <c:pt idx="18">
+                  <c:v/>
+                </c:pt>
+              </c:numCache>
+            </c:numRef>
+          </c:yVal>
+          <c:smooth val="0"/>
+        </c:ser>
+        <c:ser>
+          <c:idx val="17"/>
+          <c:order val="17"/>
+          <c:tx>
+            <c:strRef>
+              <c:f>Sheet1!$S$1</c:f>
+              <c:strCache>
+                <c:ptCount val="1"/>
+                <c:pt idx="0">
+                  <c:v>제38151회 마이크론 테크놀로지·AMD</c:v>
+                </c:pt>
+              </c:strCache>
+            </c:strRef>
+          </c:tx>
+          <c:spPr>
+            <a:solidFill>
+              <a:srgbClr val="C62828"/>
+            </a:solidFill>
+            <a:ln>
+              <a:noFill/>
+            </a:ln>
+            <a:effectLst/>
+          </c:spPr>
+          <c:marker>
+            <c:symbol val="circle"/>
+            <c:size val="9"/>
+            <c:spPr>
+              <a:solidFill>
+                <a:srgbClr val="C62828"/>
+              </a:solidFill>
+              <a:ln w="9525" cap="flat">
+                <a:solidFill>
+                  <a:srgbClr val="C62828"/>
+                </a:solidFill>
+                <a:prstDash val="solid"/>
+                <a:round/>
+              </a:ln>
+              <a:effectLst/>
+            </c:spPr>
+          </c:marker>
+          <c:xVal>
+            <c:numRef>
+              <c:f>Sheet1!$A$2:$A$20</c:f>
+              <c:numCache>
+                <c:formatCode>General</c:formatCode>
+                <c:ptCount val="19"/>
+                <c:pt idx="0">
+                  <c:v>9.5</c:v>
+                </c:pt>
+                <c:pt idx="1">
+                  <c:v>10</c:v>
+                </c:pt>
+                <c:pt idx="2">
+                  <c:v>11.1</c:v>
+                </c:pt>
+                <c:pt idx="3">
+                  <c:v>11.4</c:v>
+                </c:pt>
+                <c:pt idx="4">
+                  <c:v>12.3</c:v>
+                </c:pt>
+                <c:pt idx="5">
+                  <c:v>13.3</c:v>
+                </c:pt>
+                <c:pt idx="6">
+                  <c:v>13.8</c:v>
+                </c:pt>
+                <c:pt idx="7">
+                  <c:v>13.8</c:v>
+                </c:pt>
+                <c:pt idx="8">
+                  <c:v>15.2</c:v>
+                </c:pt>
+                <c:pt idx="9">
+                  <c:v>16.5</c:v>
+                </c:pt>
+                <c:pt idx="10">
+                  <c:v>19.2</c:v>
+                </c:pt>
+                <c:pt idx="11">
+                  <c:v>21.1</c:v>
+                </c:pt>
+                <c:pt idx="12">
+                  <c:v>21.9</c:v>
+                </c:pt>
+                <c:pt idx="13">
+                  <c:v>24.1</c:v>
+                </c:pt>
+                <c:pt idx="14">
+                  <c:v>24.3</c:v>
+                </c:pt>
+                <c:pt idx="15">
+                  <c:v>30.5</c:v>
+                </c:pt>
+                <c:pt idx="16">
+                  <c:v>38.3</c:v>
+                </c:pt>
+                <c:pt idx="17">
+                  <c:v>47.9</c:v>
+                </c:pt>
+                <c:pt idx="18">
+                  <c:v>50.2</c:v>
+                </c:pt>
+              </c:numCache>
+            </c:numRef>
+          </c:xVal>
+          <c:yVal>
+            <c:numRef>
+              <c:f>Sheet1!$S$2:$S$20</c:f>
+              <c:numCache>
+                <c:formatCode>General</c:formatCode>
+                <c:ptCount val="19"/>
+                <c:pt idx="0">
+                  <c:v/>
+                </c:pt>
+                <c:pt idx="1">
+                  <c:v/>
+                </c:pt>
+                <c:pt idx="2">
+                  <c:v/>
+                </c:pt>
+                <c:pt idx="3">
+                  <c:v/>
+                </c:pt>
+                <c:pt idx="4">
+                  <c:v/>
+                </c:pt>
+                <c:pt idx="5">
+                  <c:v/>
+                </c:pt>
+                <c:pt idx="6">
+                  <c:v/>
+                </c:pt>
+                <c:pt idx="7">
+                  <c:v/>
+                </c:pt>
+                <c:pt idx="8">
+                  <c:v/>
+                </c:pt>
+                <c:pt idx="9">
+                  <c:v/>
+                </c:pt>
+                <c:pt idx="10">
+                  <c:v/>
+                </c:pt>
+                <c:pt idx="11">
+                  <c:v/>
+                </c:pt>
+                <c:pt idx="12">
+                  <c:v/>
+                </c:pt>
+                <c:pt idx="13">
+                  <c:v/>
+                </c:pt>
+                <c:pt idx="14">
+                  <c:v/>
+                </c:pt>
+                <c:pt idx="15">
+                  <c:v/>
+                </c:pt>
+                <c:pt idx="16">
+                  <c:v/>
                 </c:pt>
                 <c:pt idx="17">
                   <c:v>26.1</c:v>
+                </c:pt>
+                <c:pt idx="18">
+                  <c:v/>
+                </c:pt>
+              </c:numCache>
+            </c:numRef>
+          </c:yVal>
+          <c:smooth val="0"/>
+        </c:ser>
+        <c:ser>
+          <c:idx val="18"/>
+          <c:order val="18"/>
+          <c:tx>
+            <c:strRef>
+              <c:f>Sheet1!$T$1</c:f>
+              <c:strCache>
+                <c:ptCount val="1"/>
+                <c:pt idx="0">
+                  <c:v>제38150회 마이크론 테크놀로지·팔란티어 테크</c:v>
+                </c:pt>
+              </c:strCache>
+            </c:strRef>
+          </c:tx>
+          <c:spPr>
+            <a:solidFill>
+              <a:srgbClr val="C62828"/>
+            </a:solidFill>
+            <a:ln>
+              <a:noFill/>
+            </a:ln>
+            <a:effectLst/>
+          </c:spPr>
+          <c:marker>
+            <c:symbol val="circle"/>
+            <c:size val="9"/>
+            <c:spPr>
+              <a:solidFill>
+                <a:srgbClr val="C62828"/>
+              </a:solidFill>
+              <a:ln w="9525" cap="flat">
+                <a:solidFill>
+                  <a:srgbClr val="C62828"/>
+                </a:solidFill>
+                <a:prstDash val="solid"/>
+                <a:round/>
+              </a:ln>
+              <a:effectLst/>
+            </c:spPr>
+          </c:marker>
+          <c:xVal>
+            <c:numRef>
+              <c:f>Sheet1!$A$2:$A$20</c:f>
+              <c:numCache>
+                <c:formatCode>General</c:formatCode>
+                <c:ptCount val="19"/>
+                <c:pt idx="0">
+                  <c:v>9.5</c:v>
+                </c:pt>
+                <c:pt idx="1">
+                  <c:v>10</c:v>
+                </c:pt>
+                <c:pt idx="2">
+                  <c:v>11.1</c:v>
+                </c:pt>
+                <c:pt idx="3">
+                  <c:v>11.4</c:v>
+                </c:pt>
+                <c:pt idx="4">
+                  <c:v>12.3</c:v>
+                </c:pt>
+                <c:pt idx="5">
+                  <c:v>13.3</c:v>
+                </c:pt>
+                <c:pt idx="6">
+                  <c:v>13.8</c:v>
+                </c:pt>
+                <c:pt idx="7">
+                  <c:v>13.8</c:v>
+                </c:pt>
+                <c:pt idx="8">
+                  <c:v>15.2</c:v>
+                </c:pt>
+                <c:pt idx="9">
+                  <c:v>16.5</c:v>
+                </c:pt>
+                <c:pt idx="10">
+                  <c:v>19.2</c:v>
+                </c:pt>
+                <c:pt idx="11">
+                  <c:v>21.1</c:v>
+                </c:pt>
+                <c:pt idx="12">
+                  <c:v>21.9</c:v>
+                </c:pt>
+                <c:pt idx="13">
+                  <c:v>24.1</c:v>
+                </c:pt>
+                <c:pt idx="14">
+                  <c:v>24.3</c:v>
+                </c:pt>
+                <c:pt idx="15">
+                  <c:v>30.5</c:v>
+                </c:pt>
+                <c:pt idx="16">
+                  <c:v>38.3</c:v>
+                </c:pt>
+                <c:pt idx="17">
+                  <c:v>47.9</c:v>
+                </c:pt>
+                <c:pt idx="18">
+                  <c:v>50.2</c:v>
+                </c:pt>
+              </c:numCache>
+            </c:numRef>
+          </c:xVal>
+          <c:yVal>
+            <c:numRef>
+              <c:f>Sheet1!$T$2:$T$20</c:f>
+              <c:numCache>
+                <c:formatCode>General</c:formatCode>
+                <c:ptCount val="19"/>
+                <c:pt idx="0">
+                  <c:v/>
+                </c:pt>
+                <c:pt idx="1">
+                  <c:v/>
+                </c:pt>
+                <c:pt idx="2">
+                  <c:v/>
+                </c:pt>
+                <c:pt idx="3">
+                  <c:v/>
+                </c:pt>
+                <c:pt idx="4">
+                  <c:v/>
+                </c:pt>
+                <c:pt idx="5">
+                  <c:v/>
+                </c:pt>
+                <c:pt idx="6">
+                  <c:v/>
+                </c:pt>
+                <c:pt idx="7">
+                  <c:v/>
+                </c:pt>
+                <c:pt idx="8">
+                  <c:v/>
+                </c:pt>
+                <c:pt idx="9">
+                  <c:v/>
+                </c:pt>
+                <c:pt idx="10">
+                  <c:v/>
+                </c:pt>
+                <c:pt idx="11">
+                  <c:v/>
+                </c:pt>
+                <c:pt idx="12">
+                  <c:v/>
+                </c:pt>
+                <c:pt idx="13">
+                  <c:v/>
+                </c:pt>
+                <c:pt idx="14">
+                  <c:v/>
+                </c:pt>
+                <c:pt idx="15">
+                  <c:v/>
+                </c:pt>
+                <c:pt idx="16">
+                  <c:v/>
+                </c:pt>
+                <c:pt idx="17">
+                  <c:v/>
                 </c:pt>
                 <c:pt idx="18">
                   <c:v>24.9</c:v>
@@ -840,23 +3624,6 @@
         <a:effectLst/>
       </c:spPr>
     </c:plotArea>
-    <c:legend>
-      <c:legendPos val="b"/>
-      <c:overlay val="0"/>
-      <c:txPr>
-        <a:bodyPr/>
-        <a:lstStyle/>
-        <a:p>
-          <a:pPr>
-            <a:defRPr sz="900">
-              <a:latin typeface="맑은 고딕"/>
-              <a:cs typeface="맑은 고딕"/>
-            </a:defRPr>
-          </a:pPr>
-          <a:endParaRPr lang="en-US"/>
-        </a:p>
-      </c:txPr>
-    </c:legend>
     <c:plotVisOnly val="1"/>
     <c:dispBlanksAs val="span"/>
     <c:showDLblsOverMax val="1"/>
@@ -27767,7 +30534,7 @@
                 <a:ea typeface="맑은 고딕" pitchFamily="34" charset="-122"/>
                 <a:cs typeface="맑은 고딕" pitchFamily="34" charset="-120"/>
               </a:rPr>
-              <a:t>이번 회차 19종을 손실 확률(B)과 연 수익률로 흩어 놓았습니다. 왼쪽 위가 적은 위험에 많이 받는 자리, 오른쪽 아래가 위험만 큰 자리입니다.</a:t>
+              <a:t>이번 회차 19종을 손실 확률(B)과 연 수익률로 흩어 놓았습니다. 왼쪽 위가 적은 위험에 많이 받는 자리, 오른쪽 아래가 위험만 큰 자리입니다. 점 위에 마우스를 올리면 회차와 기초자산이 뜹니다.</a:t>
             </a:r>
             <a:endParaRPr lang="en-US" sz="1200" dirty="0"/>
           </a:p>
@@ -27781,7 +30548,7 @@
         </p:nvGraphicFramePr>
         <p:xfrm>
           <a:off x="566928" y="1261872"/>
-          <a:ext cx="6629400" cy="4114800"/>
+          <a:ext cx="6629400" cy="3877056"/>
         </p:xfrm>
         <a:graphic xmlns:a="http://schemas.openxmlformats.org/drawingml/2006/main">
           <a:graphicData uri="http://schemas.openxmlformats.org/drawingml/2006/chart">
@@ -27792,6 +30559,198 @@
       <p:sp>
         <p:nvSpPr>
           <p:cNvPr id="6" name="Shape 3"/>
+          <p:cNvSpPr/>
+          <p:nvPr/>
+        </p:nvSpPr>
+        <p:spPr>
+          <a:xfrm>
+            <a:off x="1024128" y="5230368"/>
+            <a:ext cx="100584" cy="100584"/>
+          </a:xfrm>
+          <a:prstGeom prst="ellipse">
+            <a:avLst/>
+          </a:prstGeom>
+          <a:solidFill>
+            <a:srgbClr val="F58220"/>
+          </a:solidFill>
+          <a:ln w="12700">
+            <a:solidFill>
+              <a:srgbClr val="333333"/>
+            </a:solidFill>
+            <a:prstDash val="solid"/>
+          </a:ln>
+        </p:spPr>
+      </p:sp>
+      <p:sp>
+        <p:nvSpPr>
+          <p:cNvPr id="7" name="Text 4"/>
+          <p:cNvSpPr/>
+          <p:nvPr/>
+        </p:nvSpPr>
+        <p:spPr>
+          <a:xfrm>
+            <a:off x="1179576" y="5157216"/>
+            <a:ext cx="1463040" cy="237744"/>
+          </a:xfrm>
+          <a:prstGeom prst="rect">
+            <a:avLst/>
+          </a:prstGeom>
+          <a:noFill/>
+          <a:ln/>
+        </p:spPr>
+        <p:txBody>
+          <a:bodyPr wrap="square" lIns="0" tIns="0" rIns="0" bIns="0" rtlCol="0" anchor="ctr"/>
+          <a:lstStyle/>
+          <a:p>
+            <a:pPr indent="0" marL="0">
+              <a:buNone/>
+            </a:pPr>
+            <a:r>
+              <a:rPr lang="en-US" sz="900" dirty="0">
+                <a:solidFill>
+                  <a:srgbClr val="3D3D3D"/>
+                </a:solidFill>
+                <a:latin typeface="맑은 고딕" pitchFamily="34" charset="0"/>
+                <a:ea typeface="맑은 고딕" pitchFamily="34" charset="-122"/>
+                <a:cs typeface="맑은 고딕" pitchFamily="34" charset="-120"/>
+              </a:rPr>
+              <a:t>추천 3종</a:t>
+            </a:r>
+            <a:endParaRPr lang="en-US" sz="900" dirty="0"/>
+          </a:p>
+        </p:txBody>
+      </p:sp>
+      <p:sp>
+        <p:nvSpPr>
+          <p:cNvPr id="8" name="Shape 5"/>
+          <p:cNvSpPr/>
+          <p:nvPr/>
+        </p:nvSpPr>
+        <p:spPr>
+          <a:xfrm>
+            <a:off x="2761488" y="5230368"/>
+            <a:ext cx="100584" cy="100584"/>
+          </a:xfrm>
+          <a:prstGeom prst="ellipse">
+            <a:avLst/>
+          </a:prstGeom>
+          <a:solidFill>
+            <a:srgbClr val="9AA6B2"/>
+          </a:solidFill>
+          <a:ln w="12700">
+            <a:solidFill>
+              <a:srgbClr val="333333"/>
+            </a:solidFill>
+            <a:prstDash val="solid"/>
+          </a:ln>
+        </p:spPr>
+      </p:sp>
+      <p:sp>
+        <p:nvSpPr>
+          <p:cNvPr id="9" name="Text 6"/>
+          <p:cNvSpPr/>
+          <p:nvPr/>
+        </p:nvSpPr>
+        <p:spPr>
+          <a:xfrm>
+            <a:off x="2916936" y="5157216"/>
+            <a:ext cx="1463040" cy="237744"/>
+          </a:xfrm>
+          <a:prstGeom prst="rect">
+            <a:avLst/>
+          </a:prstGeom>
+          <a:noFill/>
+          <a:ln/>
+        </p:spPr>
+        <p:txBody>
+          <a:bodyPr wrap="square" lIns="0" tIns="0" rIns="0" bIns="0" rtlCol="0" anchor="ctr"/>
+          <a:lstStyle/>
+          <a:p>
+            <a:pPr indent="0" marL="0">
+              <a:buNone/>
+            </a:pPr>
+            <a:r>
+              <a:rPr lang="en-US" sz="900" dirty="0">
+                <a:solidFill>
+                  <a:srgbClr val="3D3D3D"/>
+                </a:solidFill>
+                <a:latin typeface="맑은 고딕" pitchFamily="34" charset="0"/>
+                <a:ea typeface="맑은 고딕" pitchFamily="34" charset="-122"/>
+                <a:cs typeface="맑은 고딕" pitchFamily="34" charset="-120"/>
+              </a:rPr>
+              <a:t>그 외 12종</a:t>
+            </a:r>
+            <a:endParaRPr lang="en-US" sz="900" dirty="0"/>
+          </a:p>
+        </p:txBody>
+      </p:sp>
+      <p:sp>
+        <p:nvSpPr>
+          <p:cNvPr id="10" name="Shape 7"/>
+          <p:cNvSpPr/>
+          <p:nvPr/>
+        </p:nvSpPr>
+        <p:spPr>
+          <a:xfrm>
+            <a:off x="4498848" y="5230368"/>
+            <a:ext cx="100584" cy="100584"/>
+          </a:xfrm>
+          <a:prstGeom prst="ellipse">
+            <a:avLst/>
+          </a:prstGeom>
+          <a:solidFill>
+            <a:srgbClr val="C62828"/>
+          </a:solidFill>
+          <a:ln w="12700">
+            <a:solidFill>
+              <a:srgbClr val="333333"/>
+            </a:solidFill>
+            <a:prstDash val="solid"/>
+          </a:ln>
+        </p:spPr>
+      </p:sp>
+      <p:sp>
+        <p:nvSpPr>
+          <p:cNvPr id="11" name="Text 8"/>
+          <p:cNvSpPr/>
+          <p:nvPr/>
+        </p:nvSpPr>
+        <p:spPr>
+          <a:xfrm>
+            <a:off x="4654296" y="5157216"/>
+            <a:ext cx="1463040" cy="237744"/>
+          </a:xfrm>
+          <a:prstGeom prst="rect">
+            <a:avLst/>
+          </a:prstGeom>
+          <a:noFill/>
+          <a:ln/>
+        </p:spPr>
+        <p:txBody>
+          <a:bodyPr wrap="square" lIns="0" tIns="0" rIns="0" bIns="0" rtlCol="0" anchor="ctr"/>
+          <a:lstStyle/>
+          <a:p>
+            <a:pPr indent="0" marL="0">
+              <a:buNone/>
+            </a:pPr>
+            <a:r>
+              <a:rPr lang="en-US" sz="900" dirty="0">
+                <a:solidFill>
+                  <a:srgbClr val="3D3D3D"/>
+                </a:solidFill>
+                <a:latin typeface="맑은 고딕" pitchFamily="34" charset="0"/>
+                <a:ea typeface="맑은 고딕" pitchFamily="34" charset="-122"/>
+                <a:cs typeface="맑은 고딕" pitchFamily="34" charset="-120"/>
+              </a:rPr>
+              <a:t>권하지 않는 4종</a:t>
+            </a:r>
+            <a:endParaRPr lang="en-US" sz="900" dirty="0"/>
+          </a:p>
+        </p:txBody>
+      </p:sp>
+      <p:sp>
+        <p:nvSpPr>
+          <p:cNvPr id="12" name="Shape 9"/>
           <p:cNvSpPr/>
           <p:nvPr/>
         </p:nvSpPr>
@@ -27816,7 +30775,7 @@
       </p:sp>
       <p:sp>
         <p:nvSpPr>
-          <p:cNvPr id="7" name="Shape 4"/>
+          <p:cNvPr id="13" name="Shape 10"/>
           <p:cNvSpPr/>
           <p:nvPr/>
         </p:nvSpPr>
@@ -27841,7 +30800,7 @@
       </p:sp>
       <p:sp>
         <p:nvSpPr>
-          <p:cNvPr id="8" name="Text 5"/>
+          <p:cNvPr id="14" name="Text 11"/>
           <p:cNvSpPr/>
           <p:nvPr/>
         </p:nvSpPr>
@@ -27880,7 +30839,7 @@
       </p:sp>
       <p:sp>
         <p:nvSpPr>
-          <p:cNvPr id="9" name="Text 6"/>
+          <p:cNvPr id="15" name="Text 12"/>
           <p:cNvSpPr/>
           <p:nvPr/>
         </p:nvSpPr>
@@ -27922,7 +30881,7 @@
       </p:sp>
       <p:sp>
         <p:nvSpPr>
-          <p:cNvPr id="10" name="Shape 7"/>
+          <p:cNvPr id="16" name="Shape 13"/>
           <p:cNvSpPr/>
           <p:nvPr/>
         </p:nvSpPr>
@@ -27947,7 +30906,7 @@
       </p:sp>
       <p:sp>
         <p:nvSpPr>
-          <p:cNvPr id="11" name="Shape 8"/>
+          <p:cNvPr id="17" name="Shape 14"/>
           <p:cNvSpPr/>
           <p:nvPr/>
         </p:nvSpPr>
@@ -27972,7 +30931,7 @@
       </p:sp>
       <p:sp>
         <p:nvSpPr>
-          <p:cNvPr id="12" name="Text 9"/>
+          <p:cNvPr id="18" name="Text 15"/>
           <p:cNvSpPr/>
           <p:nvPr/>
         </p:nvSpPr>
@@ -28011,7 +30970,7 @@
       </p:sp>
       <p:sp>
         <p:nvSpPr>
-          <p:cNvPr id="13" name="Text 10"/>
+          <p:cNvPr id="19" name="Text 16"/>
           <p:cNvSpPr/>
           <p:nvPr/>
         </p:nvSpPr>
@@ -28053,7 +31012,7 @@
       </p:sp>
       <p:sp>
         <p:nvSpPr>
-          <p:cNvPr id="14" name="Shape 11"/>
+          <p:cNvPr id="20" name="Shape 17"/>
           <p:cNvSpPr/>
           <p:nvPr/>
         </p:nvSpPr>
@@ -28078,7 +31037,7 @@
       </p:sp>
       <p:sp>
         <p:nvSpPr>
-          <p:cNvPr id="15" name="Shape 12"/>
+          <p:cNvPr id="21" name="Shape 18"/>
           <p:cNvSpPr/>
           <p:nvPr/>
         </p:nvSpPr>
@@ -28103,7 +31062,7 @@
       </p:sp>
       <p:sp>
         <p:nvSpPr>
-          <p:cNvPr id="16" name="Text 13"/>
+          <p:cNvPr id="22" name="Text 19"/>
           <p:cNvSpPr/>
           <p:nvPr/>
         </p:nvSpPr>
@@ -28142,7 +31101,7 @@
       </p:sp>
       <p:sp>
         <p:nvSpPr>
-          <p:cNvPr id="17" name="Text 14"/>
+          <p:cNvPr id="23" name="Text 20"/>
           <p:cNvSpPr/>
           <p:nvPr/>
         </p:nvSpPr>
@@ -28184,7 +31143,7 @@
       </p:sp>
       <p:sp>
         <p:nvSpPr>
-          <p:cNvPr id="18" name="Shape 15"/>
+          <p:cNvPr id="24" name="Shape 21"/>
           <p:cNvSpPr/>
           <p:nvPr/>
         </p:nvSpPr>
@@ -28209,7 +31168,7 @@
       </p:sp>
       <p:sp>
         <p:nvSpPr>
-          <p:cNvPr id="19" name="Text 16"/>
+          <p:cNvPr id="25" name="Text 22"/>
           <p:cNvSpPr/>
           <p:nvPr/>
         </p:nvSpPr>

--- a/els-sales-deck.pptx
+++ b/els-sales-deck.pptx
@@ -24542,7 +24542,7 @@
                 <a:ea typeface="맑은 고딕" pitchFamily="34" charset="-122"/>
                 <a:cs typeface="맑은 고딕" pitchFamily="34" charset="-120"/>
               </a:rPr>
-              <a:t>두 상품씩 모든 짝을 지어 보면 76.9%만 "쿠폰 높은 쪽이 더 위험" 했습니다. 나머지 15쌍은 더 받으면서 덜 위험하거나, 덜 받으면서 더 위험했습니다.</a:t>
+              <a:t>두 상품씩 모든 짝을 지어 보면 76.9%만 "쿠폰 높은 쪽이 더 위험" 했습니다. 15쌍은 더 받으면서 덜 위험하거나, 덜 받으면서 더 위험했습니다. 남은 3쌍은 수익률이나 손실 확률이 같아 가릴 수 없습니다.</a:t>
             </a:r>
             <a:endParaRPr lang="en-US" sz="900" dirty="0"/>
           </a:p>
@@ -26825,7 +26825,7 @@
                 <a:ea typeface="맑은 고딕" pitchFamily="34" charset="-122"/>
                 <a:cs typeface="맑은 고딕" pitchFamily="34" charset="-120"/>
               </a:rPr>
-              <a:t>“수익률만 보면 이게 높아 보이는데, 발행사가 공시한 이 상품의 값어치가 1만원이 아니라 6,290원입니다. 권해 드릴 수 있는 것 중 가장 높은 제38197회는 연 20.0%에 손실 확률이 24.6%입니다 — 연 3.5%p 덜 받으시지만 위험은 2.3배 차이입니다.”</a:t>
+              <a:t>“수익률만 보면 이게 높아 보이는데, 발행사가 공시한 이 상품의 값어치가 1만원이 아니라 6,290원입니다. 주의 상품을 빼고 가장 높은 제38197회는 연 20.0%에 손실 확률이 24.6%입니다 — 연 3.5%p 덜 받으시지만 위험은 2.3배 차이입니다.”</a:t>
             </a:r>
             <a:endParaRPr lang="en-US" sz="1000" dirty="0"/>
           </a:p>
@@ -27739,7 +27739,7 @@
                 <a:ea typeface="맑은 고딕" pitchFamily="34" charset="-122"/>
                 <a:cs typeface="맑은 고딕" pitchFamily="34" charset="-120"/>
               </a:rPr>
-              <a:t>그게 이번엔 안 맞습니다. 제일 높은 건 연 23.5%인 제38202회인데 손실 확률이 57.6%입니다. 권해 드릴 수 있는 것 중 가장 높은 제38197회는 연 20.0%에 손실 확률이 24.6%뿐입니다 — 연 3.5%p 덜 받으시지만 위험만 2.3배 지시는 셈입니다. 수익률과 위험은 비례하지 않습니다.</a:t>
+              <a:t>그게 이번엔 안 맞습니다. 제일 높은 건 연 23.5%인 제38202회인데 손실 확률이 57.6%입니다. 주의 상품을 빼고 가장 높은 제38197회는 연 20.0%에 손실 확률이 24.6%뿐입니다 — 연 3.5%p 덜 받으시지만 위험만 2.3배 지시는 셈입니다. 수익률과 위험은 비례하지 않습니다.</a:t>
             </a:r>
             <a:endParaRPr lang="en-US" sz="900" dirty="0"/>
           </a:p>

--- a/els-sales-deck.pptx
+++ b/els-sales-deck.pptx
@@ -24774,7 +24774,7 @@
                 <a:ea typeface="맑은 고딕" pitchFamily="34" charset="-122"/>
                 <a:cs typeface="맑은 고딕" pitchFamily="34" charset="-120"/>
               </a:rPr>
-              <a:t>  ※ 제38194회로 상관계수를 공시값 0.88에서 0.5까지 낮춰 봐도 손실 확률은 11.4%→14.8%에 머뭅니다 — 결론이 상관계수 한 값에 얹혀 있지 않습니다.</a:t>
+              <a:t>  ※ 단, 제38194회의 우위는 공시 상관계수 0.88에 기대고 있습니다 — 0.80로만 낮춰도 위험 1%당 수익률이 0.97%로 제38195회(1.04%)보다 낮아집니다.</a:t>
             </a:r>
             <a:endParaRPr lang="en-US" sz="900" dirty="0"/>
           </a:p>
@@ -26825,7 +26825,7 @@
                 <a:ea typeface="맑은 고딕" pitchFamily="34" charset="-122"/>
                 <a:cs typeface="맑은 고딕" pitchFamily="34" charset="-120"/>
               </a:rPr>
-              <a:t>“수익률만 보면 이게 높아 보이는데, 발행사가 공시한 이 상품의 값어치가 1만원이 아니라 6,290원입니다. 주의 상품을 빼고 가장 높은 제38197회는 연 20.0%에 손실 확률이 24.6%입니다 — 연 3.5%p 덜 받으시지만 위험은 2.3배 차이입니다.”</a:t>
+              <a:t>“수익률만 보면 이게 높아 보이는데, 발행사가 공시한 이 상품의 값어치가 1만원이 아니라 6,290원입니다. 권하지 않는 상품을 빼고 가장 높은 제38197회는 연 20.0%에 손실 확률이 24.6%입니다 — 연 3.5%p 덜 받으시지만 위험은 2.3배 차이입니다.”</a:t>
             </a:r>
             <a:endParaRPr lang="en-US" sz="1000" dirty="0"/>
           </a:p>
@@ -27739,7 +27739,7 @@
                 <a:ea typeface="맑은 고딕" pitchFamily="34" charset="-122"/>
                 <a:cs typeface="맑은 고딕" pitchFamily="34" charset="-120"/>
               </a:rPr>
-              <a:t>그게 이번엔 안 맞습니다. 제일 높은 건 연 23.5%인 제38202회인데 손실 확률이 57.6%입니다. 주의 상품을 빼고 가장 높은 제38197회는 연 20.0%에 손실 확률이 24.6%뿐입니다 — 연 3.5%p 덜 받으시지만 위험만 2.3배 지시는 셈입니다. 수익률과 위험은 비례하지 않습니다.</a:t>
+              <a:t>그게 이번엔 안 맞습니다. 제일 높은 건 연 23.5%인 제38202회인데 손실 확률이 57.6%입니다. 권하지 않는 상품을 빼고 가장 높은 제38197회는 연 20.0%에 손실 확률이 24.6%뿐입니다 — 연 3.5%p 덜 받으시지만 위험만 2.3배 지시는 셈입니다. 수익률과 위험은 비례하지 않습니다.</a:t>
             </a:r>
             <a:endParaRPr lang="en-US" sz="900" dirty="0"/>
           </a:p>

--- a/els-sales-deck.pptx
+++ b/els-sales-deck.pptx
@@ -24072,7 +24072,7 @@
                 <a:ea typeface="맑은 고딕" pitchFamily="34" charset="-122"/>
                 <a:cs typeface="맑은 고딕" pitchFamily="34" charset="-120"/>
               </a:rPr>
-              <a:t>이번 회차 13종을 손실 확률(B)과 연 수익률로 흩어 놓았습니다. 왼쪽 위가 적은 위험에 많이 받는 자리, 오른쪽 아래가 위험만 큰 자리입니다. 점 위에 마우스를 올리면 회차와 기초자산이 뜹니다.</a:t>
+              <a:t>이번 회차 13종을 손실 확률(B)과 연 수익률로 흩어 놓았습니다. 왼쪽 위가 적은 위험에 많이 받는 자리, 오른쪽 아래가 위험만 큰 자리입니다. PPT 파일에서는 점에 마우스를 올리면 회차와 기초자산이 뜹니다.</a:t>
             </a:r>
             <a:endParaRPr lang="en-US" sz="1200" dirty="0"/>
           </a:p>

--- a/els-sales-deck.pptx
+++ b/els-sales-deck.pptx
@@ -6296,27 +6296,7 @@
                 <a:ea typeface="맑은 고딕" pitchFamily="34" charset="-122"/>
                 <a:cs typeface="맑은 고딕" pitchFamily="34" charset="-120"/>
               </a:rPr>
-              <a:t>제38222회는 청약 2026.10.15~2026.10.22 (별도 공시)</a:t>
-            </a:r>
-            <a:endParaRPr lang="en-US" sz="850" dirty="0"/>
-          </a:p>
-          <a:p>
-            <a:pPr indent="0" marL="0">
-              <a:lnSpc>
-                <a:spcPts val="1100"/>
-              </a:lnSpc>
-              <a:buNone/>
-            </a:pPr>
-            <a:r>
-              <a:rPr lang="en-US" sz="850" dirty="0">
-                <a:solidFill>
-                  <a:srgbClr val="CB6015"/>
-                </a:solidFill>
-                <a:latin typeface="맑은 고딕" pitchFamily="34" charset="0"/>
-                <a:ea typeface="맑은 고딕" pitchFamily="34" charset="-122"/>
-                <a:cs typeface="맑은 고딕" pitchFamily="34" charset="-120"/>
-              </a:rPr>
-              <a:t>제38223회는 청약 2026.10.15~2026.10.22 (별도 공시)</a:t>
+              <a:t>제38222·38223회는 별도 공시 — 개인 마감 2026.10.19(지남), 전체 2026.10.15~2026.10.22</a:t>
             </a:r>
             <a:endParaRPr lang="en-US" sz="850" dirty="0"/>
           </a:p>
@@ -31253,7 +31233,7 @@
                 <a:ea typeface="맑은 고딕" pitchFamily="34" charset="-122"/>
                 <a:cs typeface="맑은 고딕" pitchFamily="34" charset="-120"/>
               </a:rPr>
-              <a:t>이번 회차에서 같은 위험을 지고 가장 많이 받는 쪽은 제38223회(연 21.0% · 손실 확률 25.9%)이고, 가장 적게 받는 쪽은 제38220회(연 20.5% · 57.7%)입니다. 수익률 순서로 고르면 이 차이가 보이지 않습니다.</a:t>
+              <a:t>이번 회차에서 같은 위험을 지고 가장 많이 받는 쪽은 제38223회지만 권하지 않는 상품이고, 값어치 멀쩡한 상품 중에서는 제38207회(연 9.4% · 손실 확률 13.6%)입니다. 가장 적게 받는 쪽은 제38220회(연 20.5% · 57.7%)입니다. 수익률 순서로 고르면 이 차이가 보이지 않습니다.</a:t>
             </a:r>
             <a:pPr indent="0" marL="0">
               <a:lnSpc>
@@ -31270,7 +31250,7 @@
                 <a:ea typeface="맑은 고딕" pitchFamily="34" charset="-122"/>
                 <a:cs typeface="맑은 고딕" pitchFamily="34" charset="-120"/>
               </a:rPr>
-              <a:t>  ※ 단, 제38207회(값어치 멀쩡한 상품 중 1등)의 우위는 공시 상관계수 0.22에 기대고 있습니다 — 0.50로만 낮춰도 위험 1%당 수익률이 0.64%로 제38205회(0.67%)보다 낮아집니다.</a:t>
+              <a:t>  ※ 단, 제38207회(값어치 멀쩡한 상품 중 1등)의 우위는 공시 상관계수 0.22~0.76에 기대고 있습니다 — 서류값보다 0.1씩만 낮춰도 위험 1%당 수익률이 0.65%로 제38205회(0.67%)보다 낮아집니다.</a:t>
             </a:r>
             <a:endParaRPr lang="en-US" sz="900" dirty="0"/>
           </a:p>
@@ -34767,7 +34747,7 @@
                 <a:ea typeface="맑은 고딕" pitchFamily="34" charset="-122"/>
                 <a:cs typeface="맑은 고딕" pitchFamily="34" charset="-120"/>
               </a:rPr>
-              <a:t>그게 이번엔 안 맞습니다. 제일 높은 건 연 21.0%인 제38223회인데 손실 확률이 25.9%입니다. 권하지 않는 상품을 빼고 가장 높은 제38215회는 연 18.0%에 손실 확률이 23.4%뿐입니다 — 연 3.0%p 덜 받으시지만 위험만 1.1배 지시는 셈입니다. 수익률과 위험은 비례하지 않습니다.</a:t>
+              <a:t>제일 높은 건 연 21.0%인 제38223회인데 손실 확률이 25.9%입니다. 권하지 않는 상품을 빼고 가장 높은 제38215회는 연 18.0%에 손실 확률 23.4%입니다. 이 둘은 더 받는 만큼 위험도 커지는 사이입니다. 다만 제38223회는 손실 확률이 이 자료가 권하는 선(25%)을 넘어 권하지 않습니다. 수익률을 원하시면 제38215회를, 위험을 줄이고 싶으시면 앞의 추천 3종을 보시죠.</a:t>
             </a:r>
             <a:endParaRPr lang="en-US" sz="900" dirty="0"/>
           </a:p>
@@ -35684,7 +35664,7 @@
                 <a:ea typeface="맑은 고딕" pitchFamily="34" charset="-122"/>
                 <a:cs typeface="맑은 고딕" pitchFamily="34" charset="-120"/>
               </a:rPr>
-              <a:t>개인 일반투자자 마감은 2026.10.23입니다. 숙려 후 2026.10.28까지 가입의사를 직접 확인하지 않으면 청약이 취소됩니다.</a:t>
+              <a:t>개인 일반투자자 마감은 2026.10.23입니다. 숙려 후 2026.10.28까지 가입의사를 직접 확인하지 않으면 청약이 취소됩니다. 단, 제38222·38223회는 별도 공시(청약 2026.10.15~2026.10.22)라 개인 일반투자자 마감이 10월 19일(월)로 이미 지났습니다.</a:t>
             </a:r>
             <a:endParaRPr lang="en-US" sz="950" dirty="0"/>
           </a:p>
@@ -36256,7 +36236,7 @@
                 <a:ea typeface="맑은 고딕" pitchFamily="34" charset="-122"/>
                 <a:cs typeface="맑은 고딕" pitchFamily="34" charset="-120"/>
               </a:rPr>
-              <a:t>조건·공정가격·적용 변동성·상관계수·백테스트(A)는 일괄신고추가서류(접수번호 20261014000084 · 20261016000319) 원문에서 그대로 옮겼습니다. 손실 확률(B)은 그 공시 변동성과 상관계수로 같은 조건을 10만 번 다시 돌린 값이며, 공시된 수치가 아닙니다. 수익률은 확정이 아니라 조건 충족 시의 상한입니다.</a:t>
+              <a:t>조건·공정가격·적용 변동성·상관계수·백테스트(A)는 일괄신고추가서류(접수번호 20261016000319 · 20261014000084) 원문에서 그대로 옮겼습니다. 손실 확률(B)은 그 공시 변동성과 상관계수로 같은 조건을 10만 번 다시 돌린 값이며, 공시된 수치가 아닙니다. 수익률은 확정이 아니라 조건 충족 시의 상한입니다.</a:t>
             </a:r>
             <a:endParaRPr lang="en-US" sz="850" dirty="0"/>
           </a:p>
